--- a/slides/day 1/D1C2_LR_introANNs.pptx
+++ b/slides/day 1/D1C2_LR_introANNs.pptx
@@ -5,7 +5,7 @@
     <p:sldMasterId id="2147483648" r:id="rId1"/>
   </p:sldMasterIdLst>
   <p:notesMasterIdLst>
-    <p:notesMasterId r:id="rId28"/>
+    <p:notesMasterId r:id="rId30"/>
   </p:notesMasterIdLst>
   <p:sldIdLst>
     <p:sldId id="256" r:id="rId2"/>
@@ -27,13 +27,15 @@
     <p:sldId id="274" r:id="rId18"/>
     <p:sldId id="275" r:id="rId19"/>
     <p:sldId id="277" r:id="rId20"/>
-    <p:sldId id="280" r:id="rId21"/>
-    <p:sldId id="284" r:id="rId22"/>
-    <p:sldId id="282" r:id="rId23"/>
-    <p:sldId id="285" r:id="rId24"/>
-    <p:sldId id="286" r:id="rId25"/>
-    <p:sldId id="297" r:id="rId26"/>
-    <p:sldId id="298" r:id="rId27"/>
+    <p:sldId id="299" r:id="rId21"/>
+    <p:sldId id="301" r:id="rId22"/>
+    <p:sldId id="300" r:id="rId23"/>
+    <p:sldId id="284" r:id="rId24"/>
+    <p:sldId id="282" r:id="rId25"/>
+    <p:sldId id="285" r:id="rId26"/>
+    <p:sldId id="286" r:id="rId27"/>
+    <p:sldId id="297" r:id="rId28"/>
+    <p:sldId id="298" r:id="rId29"/>
   </p:sldIdLst>
   <p:sldSz cx="12192000" cy="6858000"/>
   <p:notesSz cx="6858000" cy="9144000"/>
@@ -222,7 +224,7 @@
           <a:p>
             <a:fld id="{FF5685EE-3D40-0A4E-BB88-46887330FC0A}" type="datetimeFigureOut">
               <a:rPr lang="en-US" smtClean="0"/>
-              <a:t>10/6/2025</a:t>
+              <a:t>2/15/26</a:t>
             </a:fld>
             <a:endParaRPr lang="en-US"/>
           </a:p>
@@ -574,6 +576,357 @@
 </p:notes>
 </file>
 
+<file path=ppt/notesSlides/notesSlide2.xml><?xml version="1.0" encoding="utf-8"?>
+<p:notes xmlns:a="http://schemas.openxmlformats.org/drawingml/2006/main" xmlns:r="http://schemas.openxmlformats.org/officeDocument/2006/relationships" xmlns:p="http://schemas.openxmlformats.org/presentationml/2006/main">
+  <p:cSld>
+    <p:spTree>
+      <p:nvGrpSpPr>
+        <p:cNvPr id="1" name=""/>
+        <p:cNvGrpSpPr/>
+        <p:nvPr/>
+      </p:nvGrpSpPr>
+      <p:grpSpPr>
+        <a:xfrm>
+          <a:off x="0" y="0"/>
+          <a:ext cx="0" cy="0"/>
+          <a:chOff x="0" y="0"/>
+          <a:chExt cx="0" cy="0"/>
+        </a:xfrm>
+      </p:grpSpPr>
+      <p:sp>
+        <p:nvSpPr>
+          <p:cNvPr id="2" name="Slide Image Placeholder 1"/>
+          <p:cNvSpPr>
+            <a:spLocks noGrp="1" noRot="1" noChangeAspect="1"/>
+          </p:cNvSpPr>
+          <p:nvPr>
+            <p:ph type="sldImg"/>
+          </p:nvPr>
+        </p:nvSpPr>
+        <p:spPr/>
+      </p:sp>
+      <p:sp>
+        <p:nvSpPr>
+          <p:cNvPr id="3" name="Notes Placeholder 2"/>
+          <p:cNvSpPr>
+            <a:spLocks noGrp="1"/>
+          </p:cNvSpPr>
+          <p:nvPr>
+            <p:ph type="body" idx="1"/>
+          </p:nvPr>
+        </p:nvSpPr>
+        <p:spPr/>
+        <p:txBody>
+          <a:bodyPr/>
+          <a:lstStyle/>
+          <a:p>
+            <a:r>
+              <a:rPr lang="en-US" dirty="0"/>
+              <a:t>Do not modify the notes in this section to avoid tampering with the Poll Everywhere activity.
+More info at </a:t>
+            </a:r>
+            <a:r>
+              <a:rPr lang="en-US" dirty="0" err="1"/>
+              <a:t>polleverywhere.com</a:t>
+            </a:r>
+            <a:r>
+              <a:rPr lang="en-US" dirty="0"/>
+              <a:t>/support
+A neuron has input x = 10, weight w = 0.5, and bias b = -2. If we use a </a:t>
+            </a:r>
+            <a:r>
+              <a:rPr lang="en-US" dirty="0" err="1"/>
+              <a:t>ReLU</a:t>
+            </a:r>
+            <a:r>
+              <a:rPr lang="en-US" dirty="0"/>
+              <a:t> activation function, f(z) = max(0, z), what is the final output of this neuron?</a:t>
+            </a:r>
+          </a:p>
+          <a:p>
+            <a:r>
+              <a:rPr lang="en-US" dirty="0"/>
+              <a:t>https://</a:t>
+            </a:r>
+            <a:r>
+              <a:rPr lang="en-US" dirty="0" err="1"/>
+              <a:t>www.polleverywhere.com</a:t>
+            </a:r>
+            <a:r>
+              <a:rPr lang="en-US" dirty="0"/>
+              <a:t>/</a:t>
+            </a:r>
+            <a:r>
+              <a:rPr lang="en-US" dirty="0" err="1"/>
+              <a:t>multiple_choice_polls</a:t>
+            </a:r>
+            <a:r>
+              <a:rPr lang="en-US" dirty="0"/>
+              <a:t>/DtWfO6CJas0gbQY20TiPY?state=</a:t>
+            </a:r>
+            <a:r>
+              <a:rPr lang="en-US" dirty="0" err="1"/>
+              <a:t>opened&amp;flow</a:t>
+            </a:r>
+            <a:r>
+              <a:rPr lang="en-US" dirty="0"/>
+              <a:t>=</a:t>
+            </a:r>
+            <a:r>
+              <a:rPr lang="en-US" dirty="0" err="1"/>
+              <a:t>Default&amp;onscreen</a:t>
+            </a:r>
+            <a:r>
+              <a:rPr lang="en-US" dirty="0"/>
+              <a:t>=persist</a:t>
+            </a:r>
+          </a:p>
+          <a:p>
+            <a:endParaRPr lang="en-US" dirty="0"/>
+          </a:p>
+          <a:p>
+            <a:r>
+              <a:rPr lang="en-IE" sz="1200" kern="1200" dirty="0">
+                <a:solidFill>
+                  <a:schemeClr val="tx1"/>
+                </a:solidFill>
+                <a:effectLst/>
+                <a:latin typeface="+mn-lt"/>
+                <a:ea typeface="+mn-ea"/>
+                <a:cs typeface="+mn-cs"/>
+              </a:rPr>
+              <a:t>(10 \times 0.5) + (-2) = 3</a:t>
+            </a:r>
+            <a:endParaRPr lang="en-US" dirty="0"/>
+          </a:p>
+        </p:txBody>
+      </p:sp>
+      <p:sp>
+        <p:nvSpPr>
+          <p:cNvPr id="4" name="Slide Number Placeholder 3"/>
+          <p:cNvSpPr>
+            <a:spLocks noGrp="1"/>
+          </p:cNvSpPr>
+          <p:nvPr>
+            <p:ph type="sldNum" sz="quarter" idx="5"/>
+          </p:nvPr>
+        </p:nvSpPr>
+        <p:spPr/>
+        <p:txBody>
+          <a:bodyPr/>
+          <a:lstStyle/>
+          <a:p>
+            <a:fld id="{30752F2A-FA59-1746-ABA5-28C394E5ED08}" type="slidenum">
+              <a:rPr lang="en-US" smtClean="0"/>
+              <a:t>20</a:t>
+            </a:fld>
+            <a:endParaRPr lang="en-US"/>
+          </a:p>
+        </p:txBody>
+      </p:sp>
+    </p:spTree>
+    <p:extLst>
+      <p:ext uri="{BB962C8B-B14F-4D97-AF65-F5344CB8AC3E}">
+        <p14:creationId xmlns:p14="http://schemas.microsoft.com/office/powerpoint/2010/main" val="3228758148"/>
+      </p:ext>
+    </p:extLst>
+  </p:cSld>
+  <p:clrMapOvr>
+    <a:masterClrMapping/>
+  </p:clrMapOvr>
+</p:notes>
+</file>
+
+<file path=ppt/notesSlides/notesSlide3.xml><?xml version="1.0" encoding="utf-8"?>
+<p:notes xmlns:a="http://schemas.openxmlformats.org/drawingml/2006/main" xmlns:r="http://schemas.openxmlformats.org/officeDocument/2006/relationships" xmlns:p="http://schemas.openxmlformats.org/presentationml/2006/main">
+  <p:cSld>
+    <p:spTree>
+      <p:nvGrpSpPr>
+        <p:cNvPr id="1" name=""/>
+        <p:cNvGrpSpPr/>
+        <p:nvPr/>
+      </p:nvGrpSpPr>
+      <p:grpSpPr>
+        <a:xfrm>
+          <a:off x="0" y="0"/>
+          <a:ext cx="0" cy="0"/>
+          <a:chOff x="0" y="0"/>
+          <a:chExt cx="0" cy="0"/>
+        </a:xfrm>
+      </p:grpSpPr>
+      <p:sp>
+        <p:nvSpPr>
+          <p:cNvPr id="2" name="Slide Image Placeholder 1"/>
+          <p:cNvSpPr>
+            <a:spLocks noGrp="1" noRot="1" noChangeAspect="1"/>
+          </p:cNvSpPr>
+          <p:nvPr>
+            <p:ph type="sldImg"/>
+          </p:nvPr>
+        </p:nvSpPr>
+        <p:spPr/>
+      </p:sp>
+      <p:sp>
+        <p:nvSpPr>
+          <p:cNvPr id="3" name="Notes Placeholder 2"/>
+          <p:cNvSpPr>
+            <a:spLocks noGrp="1"/>
+          </p:cNvSpPr>
+          <p:nvPr>
+            <p:ph type="body" idx="1"/>
+          </p:nvPr>
+        </p:nvSpPr>
+        <p:spPr/>
+        <p:txBody>
+          <a:bodyPr/>
+          <a:lstStyle/>
+          <a:p>
+            <a:r>
+              <a:rPr lang="en-US"/>
+              <a:t>Do not modify the notes in this section to avoid tampering with the Poll Everywhere activity.
+More info at polleverywhere.com/support
+How many weights in a neural net with 4 inputs, 1 output and 3 hidden neurons across each of 2 hidden layers?</a:t>
+            </a:r>
+          </a:p>
+          <a:p>
+            <a:r>
+              <a:rPr lang="en-US"/>
+              <a:t>https://www.polleverywhere.com/multiple_choice_polls/jiILwRZI4f4Fp2NGhvLKg?state=opened&amp;flow=Default&amp;onscreen=persist</a:t>
+            </a:r>
+          </a:p>
+        </p:txBody>
+      </p:sp>
+      <p:sp>
+        <p:nvSpPr>
+          <p:cNvPr id="4" name="Slide Number Placeholder 3"/>
+          <p:cNvSpPr>
+            <a:spLocks noGrp="1"/>
+          </p:cNvSpPr>
+          <p:nvPr>
+            <p:ph type="sldNum" sz="quarter" idx="5"/>
+          </p:nvPr>
+        </p:nvSpPr>
+        <p:spPr/>
+        <p:txBody>
+          <a:bodyPr/>
+          <a:lstStyle/>
+          <a:p>
+            <a:fld id="{30752F2A-FA59-1746-ABA5-28C394E5ED08}" type="slidenum">
+              <a:rPr lang="en-US" smtClean="0"/>
+              <a:t>21</a:t>
+            </a:fld>
+            <a:endParaRPr lang="en-US"/>
+          </a:p>
+        </p:txBody>
+      </p:sp>
+    </p:spTree>
+    <p:extLst>
+      <p:ext uri="{BB962C8B-B14F-4D97-AF65-F5344CB8AC3E}">
+        <p14:creationId xmlns:p14="http://schemas.microsoft.com/office/powerpoint/2010/main" val="4039357474"/>
+      </p:ext>
+    </p:extLst>
+  </p:cSld>
+  <p:clrMapOvr>
+    <a:masterClrMapping/>
+  </p:clrMapOvr>
+</p:notes>
+</file>
+
+<file path=ppt/notesSlides/notesSlide4.xml><?xml version="1.0" encoding="utf-8"?>
+<p:notes xmlns:a="http://schemas.openxmlformats.org/drawingml/2006/main" xmlns:r="http://schemas.openxmlformats.org/officeDocument/2006/relationships" xmlns:p="http://schemas.openxmlformats.org/presentationml/2006/main">
+  <p:cSld>
+    <p:spTree>
+      <p:nvGrpSpPr>
+        <p:cNvPr id="1" name=""/>
+        <p:cNvGrpSpPr/>
+        <p:nvPr/>
+      </p:nvGrpSpPr>
+      <p:grpSpPr>
+        <a:xfrm>
+          <a:off x="0" y="0"/>
+          <a:ext cx="0" cy="0"/>
+          <a:chOff x="0" y="0"/>
+          <a:chExt cx="0" cy="0"/>
+        </a:xfrm>
+      </p:grpSpPr>
+      <p:sp>
+        <p:nvSpPr>
+          <p:cNvPr id="2" name="Slide Image Placeholder 1"/>
+          <p:cNvSpPr>
+            <a:spLocks noGrp="1" noRot="1" noChangeAspect="1"/>
+          </p:cNvSpPr>
+          <p:nvPr>
+            <p:ph type="sldImg"/>
+          </p:nvPr>
+        </p:nvSpPr>
+        <p:spPr/>
+      </p:sp>
+      <p:sp>
+        <p:nvSpPr>
+          <p:cNvPr id="3" name="Notes Placeholder 2"/>
+          <p:cNvSpPr>
+            <a:spLocks noGrp="1"/>
+          </p:cNvSpPr>
+          <p:nvPr>
+            <p:ph type="body" idx="1"/>
+          </p:nvPr>
+        </p:nvSpPr>
+        <p:spPr/>
+        <p:txBody>
+          <a:bodyPr/>
+          <a:lstStyle/>
+          <a:p>
+            <a:r>
+              <a:rPr lang="en-US"/>
+              <a:t>Do not modify the notes in this section to avoid tampering with the Poll Everywhere activity.
+More info at polleverywhere.com/support
+If we build a neural network with 10 hidden layers but do not use any activation functions (like ReLU or Sigmoid) between them, what is the mathematical result of the entire network?</a:t>
+            </a:r>
+          </a:p>
+          <a:p>
+            <a:r>
+              <a:rPr lang="en-US"/>
+              <a:t>https://www.polleverywhere.com/multiple_choice_polls/0DiaqtZCrsQQdBoL8wxjR?state=opened&amp;flow=Default&amp;onscreen=persist</a:t>
+            </a:r>
+          </a:p>
+        </p:txBody>
+      </p:sp>
+      <p:sp>
+        <p:nvSpPr>
+          <p:cNvPr id="4" name="Slide Number Placeholder 3"/>
+          <p:cNvSpPr>
+            <a:spLocks noGrp="1"/>
+          </p:cNvSpPr>
+          <p:nvPr>
+            <p:ph type="sldNum" sz="quarter" idx="5"/>
+          </p:nvPr>
+        </p:nvSpPr>
+        <p:spPr/>
+        <p:txBody>
+          <a:bodyPr/>
+          <a:lstStyle/>
+          <a:p>
+            <a:fld id="{30752F2A-FA59-1746-ABA5-28C394E5ED08}" type="slidenum">
+              <a:rPr lang="en-US" smtClean="0"/>
+              <a:t>22</a:t>
+            </a:fld>
+            <a:endParaRPr lang="en-US"/>
+          </a:p>
+        </p:txBody>
+      </p:sp>
+    </p:spTree>
+    <p:extLst>
+      <p:ext uri="{BB962C8B-B14F-4D97-AF65-F5344CB8AC3E}">
+        <p14:creationId xmlns:p14="http://schemas.microsoft.com/office/powerpoint/2010/main" val="3462176253"/>
+      </p:ext>
+    </p:extLst>
+  </p:cSld>
+  <p:clrMapOvr>
+    <a:masterClrMapping/>
+  </p:clrMapOvr>
+</p:notes>
+</file>
+
 <file path=ppt/slideLayouts/slideLayout1.xml><?xml version="1.0" encoding="utf-8"?>
 <p:sldLayout xmlns:a="http://schemas.openxmlformats.org/drawingml/2006/main" xmlns:r="http://schemas.openxmlformats.org/officeDocument/2006/relationships" xmlns:p="http://schemas.openxmlformats.org/presentationml/2006/main" type="title" preserve="1">
   <p:cSld name="Title Slide Colour">
@@ -767,7 +1120,7 @@
             <a:fld id="{16F2FB5F-D553-C945-B874-A642CC0C851F}" type="datetime3">
               <a:rPr lang="en-IE" smtClean="0"/>
               <a:pPr/>
-              <a:t>6 October 2025</a:t>
+              <a:t>15 February 2026</a:t>
             </a:fld>
             <a:endParaRPr lang="en-US" dirty="0"/>
           </a:p>
@@ -1638,7 +1991,7 @@
             <a:fld id="{16F2FB5F-D553-C945-B874-A642CC0C851F}" type="datetime3">
               <a:rPr lang="en-IE" smtClean="0"/>
               <a:pPr/>
-              <a:t>6 October 2025</a:t>
+              <a:t>15 February 2026</a:t>
             </a:fld>
             <a:endParaRPr lang="en-US" dirty="0"/>
           </a:p>
@@ -1850,7 +2203,7 @@
             <a:fld id="{16F2FB5F-D553-C945-B874-A642CC0C851F}" type="datetime3">
               <a:rPr lang="en-IE" smtClean="0"/>
               <a:pPr/>
-              <a:t>6 October 2025</a:t>
+              <a:t>15 February 2026</a:t>
             </a:fld>
             <a:endParaRPr lang="en-US" dirty="0"/>
           </a:p>
@@ -2025,7 +2378,7 @@
           <a:p>
             <a:fld id="{BEF41344-4D35-F145-B477-F6239A2130EE}" type="datetime3">
               <a:rPr lang="en-IE" smtClean="0"/>
-              <a:t>6 October 2025</a:t>
+              <a:t>15 February 2026</a:t>
             </a:fld>
             <a:endParaRPr lang="en-US"/>
           </a:p>
@@ -2301,7 +2654,7 @@
           <a:p>
             <a:fld id="{07196900-CA2A-2D43-9641-C5C0DD2D22D3}" type="datetime3">
               <a:rPr lang="en-IE" smtClean="0"/>
-              <a:t>6 October 2025</a:t>
+              <a:t>15 February 2026</a:t>
             </a:fld>
             <a:endParaRPr lang="en-US"/>
           </a:p>
@@ -2569,7 +2922,7 @@
           <a:p>
             <a:fld id="{8AB1A910-F8E0-D541-83F2-2CFD6E718762}" type="datetime3">
               <a:rPr lang="en-IE" smtClean="0"/>
-              <a:t>6 October 2025</a:t>
+              <a:t>15 February 2026</a:t>
             </a:fld>
             <a:endParaRPr lang="en-US"/>
           </a:p>
@@ -2711,7 +3064,7 @@
           <a:p>
             <a:fld id="{7E245B59-D3F3-5B43-BDD1-6C7B7CFD2AA6}" type="datetime3">
               <a:rPr lang="en-IE" smtClean="0"/>
-              <a:t>6 October 2025</a:t>
+              <a:t>15 February 2026</a:t>
             </a:fld>
             <a:endParaRPr lang="en-US"/>
           </a:p>
@@ -2824,7 +3177,7 @@
           <a:p>
             <a:fld id="{AD77DDCF-3644-8C44-AE36-2C59F897E125}" type="datetime3">
               <a:rPr lang="en-IE" smtClean="0"/>
-              <a:t>6 October 2025</a:t>
+              <a:t>15 February 2026</a:t>
             </a:fld>
             <a:endParaRPr lang="en-US"/>
           </a:p>
@@ -3235,7 +3588,7 @@
           <a:p>
             <a:fld id="{C1B28D5F-B017-3B47-9775-DA319F6143FF}" type="datetime3">
               <a:rPr lang="en-IE" smtClean="0"/>
-              <a:t>6 October 2025</a:t>
+              <a:t>15 February 2026</a:t>
             </a:fld>
             <a:endParaRPr lang="en-US" dirty="0"/>
           </a:p>
@@ -3806,19 +4159,19 @@
               <a:lstStyle/>
               <a:p>
                 <a:r>
-                  <a:rPr lang="en-US" sz="2000" dirty="0"/>
+                  <a:rPr lang="en-US" sz="2400" dirty="0"/>
                   <a:t>Remember element-wise steps: multiply → sum up → add bias</a:t>
                 </a:r>
               </a:p>
               <a:p>
                 <a:r>
-                  <a:rPr lang="en-US" sz="2000" dirty="0"/>
+                  <a:rPr lang="en-US" sz="2400" dirty="0"/>
                   <a:t>Check shape before and after to see if it makes sense</a:t>
                 </a:r>
               </a:p>
               <a:p>
                 <a:r>
-                  <a:rPr lang="en-IE" sz="2000" dirty="0"/>
+                  <a:rPr lang="en-IE" sz="2400" dirty="0"/>
                   <a:t>Suppose that:</a:t>
                 </a:r>
               </a:p>
@@ -3826,13 +4179,13 @@
                 <a14:m>
                   <m:oMath xmlns:m="http://schemas.openxmlformats.org/officeDocument/2006/math">
                     <m:r>
-                      <a:rPr lang="en-IE" sz="2000" b="0" i="1" smtClean="0">
+                      <a:rPr lang="en-IE" sz="2400" b="0" i="1" smtClean="0">
                         <a:latin typeface="Cambria Math" panose="02040503050406030204" pitchFamily="18" charset="0"/>
                       </a:rPr>
                       <m:t>𝑊</m:t>
                     </m:r>
                     <m:r>
-                      <a:rPr lang="en-IE" sz="2000" b="0" i="1" smtClean="0">
+                      <a:rPr lang="en-IE" sz="2400" b="0" i="1" smtClean="0">
                         <a:latin typeface="Cambria Math" panose="02040503050406030204" pitchFamily="18" charset="0"/>
                       </a:rPr>
                       <m:t>= </m:t>
@@ -3842,7 +4195,7 @@
                         <m:begChr m:val="["/>
                         <m:endChr m:val="]"/>
                         <m:ctrlPr>
-                          <a:rPr lang="en-IE" sz="2000" b="0" i="1" smtClean="0">
+                          <a:rPr lang="en-IE" sz="2400" b="0" i="1" smtClean="0">
                             <a:latin typeface="Cambria Math" panose="02040503050406030204" pitchFamily="18" charset="0"/>
                           </a:rPr>
                         </m:ctrlPr>
@@ -3859,7 +4212,7 @@
                               </m:mc>
                             </m:mcs>
                             <m:ctrlPr>
-                              <a:rPr lang="en-IE" sz="2000" b="0" i="1" smtClean="0">
+                              <a:rPr lang="en-IE" sz="2400" b="0" i="1" smtClean="0">
                                 <a:latin typeface="Cambria Math" panose="02040503050406030204" pitchFamily="18" charset="0"/>
                               </a:rPr>
                             </m:ctrlPr>
@@ -3870,7 +4223,7 @@
                                 <m:rPr>
                                   <m:brk m:alnAt="7"/>
                                 </m:rPr>
-                                <a:rPr lang="en-IE" sz="2000" b="0" i="1" smtClean="0">
+                                <a:rPr lang="en-IE" sz="2400" b="0" i="1" smtClean="0">
                                   <a:latin typeface="Cambria Math" panose="02040503050406030204" pitchFamily="18" charset="0"/>
                                 </a:rPr>
                                 <m:t>3</m:t>
@@ -3878,7 +4231,7 @@
                             </m:e>
                             <m:e>
                               <m:r>
-                                <a:rPr lang="en-IE" sz="2000" b="0" i="1" smtClean="0">
+                                <a:rPr lang="en-IE" sz="2400" b="0" i="1" smtClean="0">
                                   <a:latin typeface="Cambria Math" panose="02040503050406030204" pitchFamily="18" charset="0"/>
                                 </a:rPr>
                                 <m:t>2</m:t>
@@ -3890,14 +4243,14 @@
                               <m:eqArr>
                                 <m:eqArrPr>
                                   <m:ctrlPr>
-                                    <a:rPr lang="en-IE" sz="2000" b="0" i="1" smtClean="0">
+                                    <a:rPr lang="en-IE" sz="2400" b="0" i="1" smtClean="0">
                                       <a:latin typeface="Cambria Math" panose="02040503050406030204" pitchFamily="18" charset="0"/>
                                     </a:rPr>
                                   </m:ctrlPr>
                                 </m:eqArrPr>
                                 <m:e>
                                   <m:r>
-                                    <a:rPr lang="en-IE" sz="2000" b="0" i="1" smtClean="0">
+                                    <a:rPr lang="en-IE" sz="2400" b="0" i="1" smtClean="0">
                                       <a:latin typeface="Cambria Math" panose="02040503050406030204" pitchFamily="18" charset="0"/>
                                     </a:rPr>
                                     <m:t>−1</m:t>
@@ -3905,7 +4258,7 @@
                                 </m:e>
                                 <m:e>
                                   <m:r>
-                                    <a:rPr lang="en-IE" sz="2000" b="0" i="1" smtClean="0">
+                                    <a:rPr lang="en-IE" sz="2400" b="0" i="1" smtClean="0">
                                       <a:latin typeface="Cambria Math" panose="02040503050406030204" pitchFamily="18" charset="0"/>
                                     </a:rPr>
                                     <m:t>−1</m:t>
@@ -3917,14 +4270,14 @@
                               <m:eqArr>
                                 <m:eqArrPr>
                                   <m:ctrlPr>
-                                    <a:rPr lang="en-IE" sz="2000" b="0" i="1" smtClean="0">
+                                    <a:rPr lang="en-IE" sz="2400" b="0" i="1" smtClean="0">
                                       <a:latin typeface="Cambria Math" panose="02040503050406030204" pitchFamily="18" charset="0"/>
                                     </a:rPr>
                                   </m:ctrlPr>
                                 </m:eqArrPr>
                                 <m:e>
                                   <m:r>
-                                    <a:rPr lang="en-IE" sz="2000" b="0" i="1" smtClean="0">
+                                    <a:rPr lang="en-IE" sz="2400" b="0" i="1" smtClean="0">
                                       <a:latin typeface="Cambria Math" panose="02040503050406030204" pitchFamily="18" charset="0"/>
                                     </a:rPr>
                                     <m:t>0</m:t>
@@ -3932,7 +4285,7 @@
                                 </m:e>
                                 <m:e>
                                   <m:r>
-                                    <a:rPr lang="en-IE" sz="2000" b="0" i="1" smtClean="0">
+                                    <a:rPr lang="en-IE" sz="2400" b="0" i="1" smtClean="0">
                                       <a:latin typeface="Cambria Math" panose="02040503050406030204" pitchFamily="18" charset="0"/>
                                     </a:rPr>
                                     <m:t>1</m:t>
@@ -3945,19 +4298,19 @@
                       </m:e>
                     </m:d>
                     <m:r>
-                      <a:rPr lang="en-IE" sz="2000" b="0" i="1" smtClean="0">
+                      <a:rPr lang="en-IE" sz="2400" b="0" i="1" smtClean="0">
                         <a:latin typeface="Cambria Math" panose="02040503050406030204" pitchFamily="18" charset="0"/>
                       </a:rPr>
                       <m:t>, </m:t>
                     </m:r>
                     <m:r>
-                      <a:rPr lang="en-IE" sz="2000" b="0" i="1" smtClean="0">
+                      <a:rPr lang="en-IE" sz="2400" b="0" i="1" smtClean="0">
                         <a:latin typeface="Cambria Math" panose="02040503050406030204" pitchFamily="18" charset="0"/>
                       </a:rPr>
                       <m:t>𝑏</m:t>
                     </m:r>
                     <m:r>
-                      <a:rPr lang="en-IE" sz="2000" b="0" i="1" smtClean="0">
+                      <a:rPr lang="en-IE" sz="2400" b="0" i="1" smtClean="0">
                         <a:latin typeface="Cambria Math" panose="02040503050406030204" pitchFamily="18" charset="0"/>
                       </a:rPr>
                       <m:t>=</m:t>
@@ -3967,7 +4320,7 @@
                         <m:begChr m:val="["/>
                         <m:endChr m:val="]"/>
                         <m:ctrlPr>
-                          <a:rPr lang="en-IE" sz="2000" b="0" i="1" smtClean="0">
+                          <a:rPr lang="en-IE" sz="2400" b="0" i="1" smtClean="0">
                             <a:latin typeface="Cambria Math" panose="02040503050406030204" pitchFamily="18" charset="0"/>
                           </a:rPr>
                         </m:ctrlPr>
@@ -3984,7 +4337,7 @@
                               </m:mc>
                             </m:mcs>
                             <m:ctrlPr>
-                              <a:rPr lang="en-IE" sz="2000" b="0" i="1" smtClean="0">
+                              <a:rPr lang="en-IE" sz="2400" b="0" i="1" smtClean="0">
                                 <a:latin typeface="Cambria Math" panose="02040503050406030204" pitchFamily="18" charset="0"/>
                               </a:rPr>
                             </m:ctrlPr>
@@ -3995,7 +4348,7 @@
                                 <m:rPr>
                                   <m:brk m:alnAt="7"/>
                                 </m:rPr>
-                                <a:rPr lang="en-IE" sz="2000" b="0" i="1" smtClean="0">
+                                <a:rPr lang="en-IE" sz="2400" b="0" i="1" smtClean="0">
                                   <a:latin typeface="Cambria Math" panose="02040503050406030204" pitchFamily="18" charset="0"/>
                                 </a:rPr>
                                 <m:t>2</m:t>
@@ -4007,14 +4360,14 @@
                               <m:eqArr>
                                 <m:eqArrPr>
                                   <m:ctrlPr>
-                                    <a:rPr lang="en-IE" sz="2000" b="0" i="1" smtClean="0">
+                                    <a:rPr lang="en-IE" sz="2400" b="0" i="1" smtClean="0">
                                       <a:latin typeface="Cambria Math" panose="02040503050406030204" pitchFamily="18" charset="0"/>
                                     </a:rPr>
                                   </m:ctrlPr>
                                 </m:eqArrPr>
                                 <m:e>
                                   <m:r>
-                                    <a:rPr lang="en-IE" sz="2000" b="0" i="1" smtClean="0">
+                                    <a:rPr lang="en-IE" sz="2400" b="0" i="1" smtClean="0">
                                       <a:latin typeface="Cambria Math" panose="02040503050406030204" pitchFamily="18" charset="0"/>
                                     </a:rPr>
                                     <m:t>3</m:t>
@@ -4022,7 +4375,7 @@
                                 </m:e>
                                 <m:e>
                                   <m:r>
-                                    <a:rPr lang="en-IE" sz="2000" b="0" i="1" smtClean="0">
+                                    <a:rPr lang="en-IE" sz="2400" b="0" i="1" smtClean="0">
                                       <a:latin typeface="Cambria Math" panose="02040503050406030204" pitchFamily="18" charset="0"/>
                                     </a:rPr>
                                     <m:t>0</m:t>
@@ -4035,7 +4388,7 @@
                       </m:e>
                     </m:d>
                     <m:r>
-                      <a:rPr lang="en-IE" sz="2000" b="0" i="1" smtClean="0">
+                      <a:rPr lang="en-IE" sz="2400" b="0" i="1" smtClean="0">
                         <a:latin typeface="Cambria Math" panose="02040503050406030204" pitchFamily="18" charset="0"/>
                       </a:rPr>
                       <m:t>, </m:t>
@@ -4044,25 +4397,25 @@
                       <m:rPr>
                         <m:sty m:val="p"/>
                       </m:rPr>
-                      <a:rPr lang="en-IE" sz="2000" b="0" i="0" smtClean="0">
+                      <a:rPr lang="en-IE" sz="2400" b="0" i="0" smtClean="0">
                         <a:latin typeface="Cambria Math" panose="02040503050406030204" pitchFamily="18" charset="0"/>
                       </a:rPr>
                       <m:t>and</m:t>
                     </m:r>
                     <m:r>
-                      <a:rPr lang="en-IE" sz="2000" b="0" i="1" smtClean="0">
+                      <a:rPr lang="en-IE" sz="2400" b="0" i="1" smtClean="0">
                         <a:latin typeface="Cambria Math" panose="02040503050406030204" pitchFamily="18" charset="0"/>
                       </a:rPr>
                       <m:t> </m:t>
                     </m:r>
                     <m:r>
-                      <a:rPr lang="en-IE" sz="2000" b="0" i="1" smtClean="0">
+                      <a:rPr lang="en-IE" sz="2400" b="0" i="1" smtClean="0">
                         <a:latin typeface="Cambria Math" panose="02040503050406030204" pitchFamily="18" charset="0"/>
                       </a:rPr>
                       <m:t>𝑥</m:t>
                     </m:r>
                     <m:r>
-                      <a:rPr lang="en-IE" sz="2000" b="0" i="1" smtClean="0">
+                      <a:rPr lang="en-IE" sz="2400" b="0" i="1" smtClean="0">
                         <a:latin typeface="Cambria Math" panose="02040503050406030204" pitchFamily="18" charset="0"/>
                       </a:rPr>
                       <m:t>= </m:t>
@@ -4072,7 +4425,7 @@
                         <m:begChr m:val="["/>
                         <m:endChr m:val="]"/>
                         <m:ctrlPr>
-                          <a:rPr lang="en-IE" sz="2000" b="0" i="1" smtClean="0">
+                          <a:rPr lang="en-IE" sz="2400" b="0" i="1" smtClean="0">
                             <a:latin typeface="Cambria Math" panose="02040503050406030204" pitchFamily="18" charset="0"/>
                           </a:rPr>
                         </m:ctrlPr>
@@ -4089,7 +4442,7 @@
                               </m:mc>
                             </m:mcs>
                             <m:ctrlPr>
-                              <a:rPr lang="en-IE" sz="2000" b="0" i="1" smtClean="0">
+                              <a:rPr lang="en-IE" sz="2400" b="0" i="1" smtClean="0">
                                 <a:latin typeface="Cambria Math" panose="02040503050406030204" pitchFamily="18" charset="0"/>
                               </a:rPr>
                             </m:ctrlPr>
@@ -4100,7 +4453,7 @@
                                 <m:rPr>
                                   <m:brk m:alnAt="7"/>
                                 </m:rPr>
-                                <a:rPr lang="en-IE" sz="2000" b="0" i="1" smtClean="0">
+                                <a:rPr lang="en-IE" sz="2400" b="0" i="1" smtClean="0">
                                   <a:latin typeface="Cambria Math" panose="02040503050406030204" pitchFamily="18" charset="0"/>
                                 </a:rPr>
                                 <m:t>1</m:t>
@@ -4110,7 +4463,7 @@
                           <m:mr>
                             <m:e>
                               <m:r>
-                                <a:rPr lang="en-IE" sz="2000" b="0" i="1" smtClean="0">
+                                <a:rPr lang="en-IE" sz="2400" b="0" i="1" smtClean="0">
                                   <a:latin typeface="Cambria Math" panose="02040503050406030204" pitchFamily="18" charset="0"/>
                                 </a:rPr>
                                 <m:t>1</m:t>
@@ -4122,11 +4475,11 @@
                     </m:d>
                   </m:oMath>
                 </a14:m>
-                <a:endParaRPr lang="en-US" sz="2000" dirty="0"/>
+                <a:endParaRPr lang="en-US" sz="2400" dirty="0"/>
               </a:p>
               <a:p>
                 <a:r>
-                  <a:rPr lang="en-US" sz="2000" dirty="0">
+                  <a:rPr lang="en-US" sz="2400" dirty="0">
                     <a:solidFill>
                       <a:srgbClr val="009749"/>
                     </a:solidFill>
@@ -4139,7 +4492,7 @@
                       <m:accPr>
                         <m:chr m:val="̂"/>
                         <m:ctrlPr>
-                          <a:rPr lang="en-IE" sz="2000" i="1" dirty="0" smtClean="0">
+                          <a:rPr lang="en-IE" sz="2400" i="1" dirty="0" smtClean="0">
                             <a:solidFill>
                               <a:srgbClr val="009749"/>
                             </a:solidFill>
@@ -4149,7 +4502,7 @@
                       </m:accPr>
                       <m:e>
                         <m:r>
-                          <a:rPr lang="en-IE" sz="2000" b="0" i="1" dirty="0" smtClean="0">
+                          <a:rPr lang="en-IE" sz="2400" b="0" i="1" dirty="0" smtClean="0">
                             <a:solidFill>
                               <a:srgbClr val="009749"/>
                             </a:solidFill>
@@ -4160,7 +4513,7 @@
                       </m:e>
                     </m:acc>
                     <m:r>
-                      <a:rPr lang="en-IE" sz="2000" b="0" i="1" smtClean="0">
+                      <a:rPr lang="en-IE" sz="2400" b="0" i="1" smtClean="0">
                         <a:solidFill>
                           <a:srgbClr val="009749"/>
                         </a:solidFill>
@@ -4169,7 +4522,7 @@
                       <m:t>=</m:t>
                     </m:r>
                     <m:r>
-                      <a:rPr lang="en-IE" sz="2000" b="0" i="1" smtClean="0">
+                      <a:rPr lang="en-IE" sz="2400" b="0" i="1" smtClean="0">
                         <a:solidFill>
                           <a:srgbClr val="009749"/>
                         </a:solidFill>
@@ -4178,7 +4531,7 @@
                       <m:t>𝑊</m:t>
                     </m:r>
                     <m:r>
-                      <a:rPr lang="en-IE" sz="2000" b="0" i="1" smtClean="0">
+                      <a:rPr lang="en-IE" sz="2400" b="0" i="1" smtClean="0">
                         <a:solidFill>
                           <a:srgbClr val="009749"/>
                         </a:solidFill>
@@ -4187,7 +4540,7 @@
                       <m:t>⋅</m:t>
                     </m:r>
                     <m:r>
-                      <a:rPr lang="en-IE" sz="2000" b="0" i="1" smtClean="0">
+                      <a:rPr lang="en-IE" sz="2400" b="0" i="1" smtClean="0">
                         <a:solidFill>
                           <a:srgbClr val="009749"/>
                         </a:solidFill>
@@ -4196,7 +4549,7 @@
                       <m:t>𝑥</m:t>
                     </m:r>
                     <m:r>
-                      <a:rPr lang="en-IE" sz="2000" b="0" i="1" smtClean="0">
+                      <a:rPr lang="en-IE" sz="2400" b="0" i="1" smtClean="0">
                         <a:solidFill>
                           <a:srgbClr val="009749"/>
                         </a:solidFill>
@@ -4205,7 +4558,7 @@
                       <m:t>+</m:t>
                     </m:r>
                     <m:r>
-                      <a:rPr lang="en-IE" sz="2000" b="0" i="1" smtClean="0">
+                      <a:rPr lang="en-IE" sz="2400" b="0" i="1" smtClean="0">
                         <a:solidFill>
                           <a:srgbClr val="009749"/>
                         </a:solidFill>
@@ -4214,7 +4567,7 @@
                       <m:t>𝑏</m:t>
                     </m:r>
                     <m:r>
-                      <a:rPr lang="en-US" sz="2000" b="0" i="1" smtClean="0">
+                      <a:rPr lang="en-US" sz="2400" b="0" i="1" smtClean="0">
                         <a:solidFill>
                           <a:srgbClr val="009749"/>
                         </a:solidFill>
@@ -4224,11 +4577,11 @@
                     </m:r>
                   </m:oMath>
                 </a14:m>
-                <a:endParaRPr lang="en-US" sz="2000" dirty="0"/>
+                <a:endParaRPr lang="en-US" sz="2400" dirty="0"/>
               </a:p>
               <a:p>
                 <a:r>
-                  <a:rPr lang="en-US" sz="2000" dirty="0"/>
+                  <a:rPr lang="en-US" sz="2400" dirty="0"/>
                   <a:t>(Also: can you guess the dimensions of y before you compute it?)</a:t>
                 </a:r>
               </a:p>
@@ -4262,7 +4615,7 @@
               <a:blipFill>
                 <a:blip r:embed="rId2"/>
                 <a:stretch>
-                  <a:fillRect l="-657" t="-1322"/>
+                  <a:fillRect l="-1064" t="-2134"/>
                 </a:stretch>
               </a:blipFill>
             </p:spPr>
@@ -4271,7 +4624,7 @@
               <a:lstStyle/>
               <a:p>
                 <a:r>
-                  <a:rPr lang="en-IE">
+                  <a:rPr lang="en-US">
                     <a:noFill/>
                   </a:rPr>
                   <a:t> </a:t>
@@ -4492,7 +4845,7 @@
                 </a:r>
                 <a:r>
                   <a:rPr lang="en-US" dirty="0"/>
-                  <a:t>, and our outputs are tomorrow’s value of these variables</a:t>
+                  <a:t>, and our outputs are value of these variables in e.g. 6 hours’ time</a:t>
                 </a:r>
               </a:p>
               <a:p>
@@ -8451,13 +8804,13 @@
             <p:spPr/>
             <p:txBody>
               <a:bodyPr>
-                <a:normAutofit fontScale="92500" lnSpcReduction="20000"/>
+                <a:normAutofit fontScale="85000" lnSpcReduction="20000"/>
               </a:bodyPr>
               <a:lstStyle/>
               <a:p>
                 <a:r>
                   <a:rPr lang="en-US" dirty="0"/>
-                  <a:t>Without them: just one big matrix (linear function) </a:t>
+                  <a:t>Without them: just one big matrix multiplication (linear function) </a:t>
                 </a:r>
               </a:p>
               <a:p>
@@ -8575,7 +8928,15 @@
               <a:p>
                 <a:r>
                   <a:rPr lang="en-US" dirty="0"/>
-                  <a:t>There are hundreds, but we will discuss: ReLU, Sigmoid, tanh</a:t>
+                  <a:t>There are hundreds, but we will discuss: ReLU, </a:t>
+                </a:r>
+                <a:r>
+                  <a:rPr lang="en-US" dirty="0" err="1"/>
+                  <a:t>GeLU</a:t>
+                </a:r>
+                <a:r>
+                  <a:rPr lang="en-US" dirty="0"/>
+                  <a:t>, Sigmoid, tanh</a:t>
                 </a:r>
               </a:p>
               <a:p>
@@ -8618,7 +8979,7 @@
               <a:blipFill>
                 <a:blip r:embed="rId3"/>
                 <a:stretch>
-                  <a:fillRect l="-1216" t="-3659" r="-1368"/>
+                  <a:fillRect l="-1064" t="-3354" r="-608" b="-610"/>
                 </a:stretch>
               </a:blipFill>
             </p:spPr>
@@ -9964,25 +10325,25 @@
           <a:p>
             <a:r>
               <a:rPr lang="en-US" dirty="0"/>
-              <a:t>Understand what neural networks are and how they create predictions.</a:t>
+              <a:t>Understand what neural networks are and how they create predictions</a:t>
             </a:r>
           </a:p>
           <a:p>
             <a:r>
               <a:rPr lang="en-US" dirty="0"/>
-              <a:t>Build a small neural network step by step.</a:t>
+              <a:t>Build a small neural network step by step</a:t>
             </a:r>
           </a:p>
           <a:p>
             <a:r>
               <a:rPr lang="en-US" dirty="0"/>
-              <a:t>Practice dot products, linear transforms, and activations by hand.</a:t>
+              <a:t>Practice dot products, linear transforms, and activations by hand</a:t>
             </a:r>
           </a:p>
           <a:p>
             <a:r>
               <a:rPr lang="en-US" dirty="0"/>
-              <a:t>Prepare for coding NNs in the next session.</a:t>
+              <a:t>Prepare for coding NNs in the next session</a:t>
             </a:r>
           </a:p>
         </p:txBody>
@@ -10051,7 +10412,7 @@
           <p:cNvPr id="2" name="Title 1">
             <a:extLst>
               <a:ext uri="{FF2B5EF4-FFF2-40B4-BE49-F238E27FC236}">
-                <a16:creationId xmlns:a16="http://schemas.microsoft.com/office/drawing/2014/main" id="{0B4DB222-68CC-60AA-CCAA-92FF3EBC17B8}"/>
+                <a16:creationId xmlns:a16="http://schemas.microsoft.com/office/drawing/2014/main" id="{7427FDB7-9DC8-6B40-10D3-9575192F76E2}"/>
               </a:ext>
             </a:extLst>
           </p:cNvPr>
@@ -10059,7 +10420,7 @@
             <a:spLocks noGrp="1"/>
           </p:cNvSpPr>
           <p:nvPr>
-            <p:ph type="title"/>
+            <p:ph type="ctrTitle"/>
           </p:nvPr>
         </p:nvSpPr>
         <p:spPr/>
@@ -10067,19 +10428,16 @@
           <a:bodyPr/>
           <a:lstStyle/>
           <a:p>
-            <a:r>
-              <a:rPr lang="en-US" dirty="0"/>
-              <a:t>Quiz Time – Check Your Understanding</a:t>
-            </a:r>
+            <a:endParaRPr lang="en-US"/>
           </a:p>
         </p:txBody>
       </p:sp>
       <p:sp>
         <p:nvSpPr>
-          <p:cNvPr id="3" name="Content Placeholder 2">
-            <a:extLst>
-              <a:ext uri="{FF2B5EF4-FFF2-40B4-BE49-F238E27FC236}">
-                <a16:creationId xmlns:a16="http://schemas.microsoft.com/office/drawing/2014/main" id="{DBB27D07-79B5-64BC-4645-492301B1BE82}"/>
+          <p:cNvPr id="3" name="Subtitle 2">
+            <a:extLst>
+              <a:ext uri="{FF2B5EF4-FFF2-40B4-BE49-F238E27FC236}">
+                <a16:creationId xmlns:a16="http://schemas.microsoft.com/office/drawing/2014/main" id="{3BAA89DE-AE97-4CA4-C39B-91D79C4A0885}"/>
               </a:ext>
             </a:extLst>
           </p:cNvPr>
@@ -10087,7 +10445,7 @@
             <a:spLocks noGrp="1"/>
           </p:cNvSpPr>
           <p:nvPr>
-            <p:ph idx="1"/>
+            <p:ph type="subTitle" idx="1"/>
           </p:nvPr>
         </p:nvSpPr>
         <p:spPr/>
@@ -10095,23 +10453,16 @@
           <a:bodyPr/>
           <a:lstStyle/>
           <a:p>
-            <a:r>
-              <a:rPr lang="en-US" dirty="0">
-                <a:solidFill>
-                  <a:srgbClr val="009749"/>
-                </a:solidFill>
-              </a:rPr>
-              <a:t>Exercise: how many weights in a neural net with 4 inputs, 1 output and 3 hidden neurons across each of 2 hidden layers?</a:t>
-            </a:r>
+            <a:endParaRPr lang="en-US"/>
           </a:p>
         </p:txBody>
       </p:sp>
       <p:sp>
         <p:nvSpPr>
-          <p:cNvPr id="4" name="Slide Number Placeholder 3">
-            <a:extLst>
-              <a:ext uri="{FF2B5EF4-FFF2-40B4-BE49-F238E27FC236}">
-                <a16:creationId xmlns:a16="http://schemas.microsoft.com/office/drawing/2014/main" id="{8E6F1295-7270-2E68-1160-31D323D1EC30}"/>
+          <p:cNvPr id="4" name="Date Placeholder 3">
+            <a:extLst>
+              <a:ext uri="{FF2B5EF4-FFF2-40B4-BE49-F238E27FC236}">
+                <a16:creationId xmlns:a16="http://schemas.microsoft.com/office/drawing/2014/main" id="{1301138B-4C36-1C9A-A4F5-4E4F0C813EB3}"/>
               </a:ext>
             </a:extLst>
           </p:cNvPr>
@@ -10119,7 +10470,7 @@
             <a:spLocks noGrp="1"/>
           </p:cNvSpPr>
           <p:nvPr>
-            <p:ph type="sldNum" sz="quarter" idx="12"/>
+            <p:ph type="dt" sz="half" idx="10"/>
           </p:nvPr>
         </p:nvSpPr>
         <p:spPr/>
@@ -10127,18 +10478,49 @@
           <a:bodyPr/>
           <a:lstStyle/>
           <a:p>
-            <a:fld id="{8E65201D-48DB-3B45-ABC2-018B1E66F34C}" type="slidenum">
-              <a:rPr lang="en-US" smtClean="0"/>
-              <a:t>20</a:t>
+            <a:fld id="{16F2FB5F-D553-C945-B874-A642CC0C851F}" type="datetime3">
+              <a:rPr lang="en-IE" smtClean="0"/>
+              <a:pPr/>
+              <a:t>15 February 2026</a:t>
             </a:fld>
-            <a:endParaRPr lang="en-US"/>
+            <a:endParaRPr lang="en-US" dirty="0"/>
           </a:p>
         </p:txBody>
       </p:sp>
+      <p:pic>
+        <p:nvPicPr>
+          <p:cNvPr id="6" name="slide.url=https://www.polleverywhere.com/multiple_choice_polls/DtWfO6CJas0gbQY20TiPY?state=opened&amp;flow=Default&amp;onscreen=persist">
+            <a:extLst>
+              <a:ext uri="{FF2B5EF4-FFF2-40B4-BE49-F238E27FC236}">
+                <a16:creationId xmlns:a16="http://schemas.microsoft.com/office/drawing/2014/main" id="{96B75039-9FBE-7F19-980B-89C7697003F9}"/>
+              </a:ext>
+            </a:extLst>
+          </p:cNvPr>
+          <p:cNvPicPr>
+            <a:picLocks/>
+          </p:cNvPicPr>
+          <p:nvPr/>
+        </p:nvPicPr>
+        <p:blipFill>
+          <a:blip r:embed="rId3"/>
+          <a:stretch>
+            <a:fillRect/>
+          </a:stretch>
+        </p:blipFill>
+        <p:spPr>
+          <a:xfrm>
+            <a:off x="63500" y="63500"/>
+            <a:ext cx="12065000" cy="6731000"/>
+          </a:xfrm>
+          <a:prstGeom prst="rect">
+            <a:avLst/>
+          </a:prstGeom>
+        </p:spPr>
+      </p:pic>
     </p:spTree>
     <p:extLst>
       <p:ext uri="{BB962C8B-B14F-4D97-AF65-F5344CB8AC3E}">
-        <p14:creationId xmlns:p14="http://schemas.microsoft.com/office/powerpoint/2010/main" val="1785516979"/>
+        <p14:creationId xmlns:p14="http://schemas.microsoft.com/office/powerpoint/2010/main" val="2340745283"/>
       </p:ext>
     </p:extLst>
   </p:cSld>
@@ -10170,7 +10552,7 @@
           <p:cNvPr id="2" name="Title 1">
             <a:extLst>
               <a:ext uri="{FF2B5EF4-FFF2-40B4-BE49-F238E27FC236}">
-                <a16:creationId xmlns:a16="http://schemas.microsoft.com/office/drawing/2014/main" id="{5A499AFC-C4A5-6623-D6A1-C3D2BF4B203B}"/>
+                <a16:creationId xmlns:a16="http://schemas.microsoft.com/office/drawing/2014/main" id="{9B93A841-B1BB-618E-599A-DEF23D0AD93E}"/>
               </a:ext>
             </a:extLst>
           </p:cNvPr>
@@ -10178,7 +10560,7 @@
             <a:spLocks noGrp="1"/>
           </p:cNvSpPr>
           <p:nvPr>
-            <p:ph type="title"/>
+            <p:ph type="ctrTitle"/>
           </p:nvPr>
         </p:nvSpPr>
         <p:spPr/>
@@ -10186,19 +10568,16 @@
           <a:bodyPr/>
           <a:lstStyle/>
           <a:p>
-            <a:r>
-              <a:rPr lang="en-US" dirty="0"/>
-              <a:t>Common pitfalls</a:t>
-            </a:r>
+            <a:endParaRPr lang="en-US"/>
           </a:p>
         </p:txBody>
       </p:sp>
       <p:sp>
         <p:nvSpPr>
-          <p:cNvPr id="3" name="Content Placeholder 2">
-            <a:extLst>
-              <a:ext uri="{FF2B5EF4-FFF2-40B4-BE49-F238E27FC236}">
-                <a16:creationId xmlns:a16="http://schemas.microsoft.com/office/drawing/2014/main" id="{2444770E-3C97-6C94-66DF-E608F3577706}"/>
+          <p:cNvPr id="3" name="Subtitle 2">
+            <a:extLst>
+              <a:ext uri="{FF2B5EF4-FFF2-40B4-BE49-F238E27FC236}">
+                <a16:creationId xmlns:a16="http://schemas.microsoft.com/office/drawing/2014/main" id="{34974194-CB9F-5E59-FA4F-20EB1113EF37}"/>
               </a:ext>
             </a:extLst>
           </p:cNvPr>
@@ -10206,7 +10585,7 @@
             <a:spLocks noGrp="1"/>
           </p:cNvSpPr>
           <p:nvPr>
-            <p:ph idx="1"/>
+            <p:ph type="subTitle" idx="1"/>
           </p:nvPr>
         </p:nvSpPr>
         <p:spPr/>
@@ -10214,43 +10593,16 @@
           <a:bodyPr/>
           <a:lstStyle/>
           <a:p>
-            <a:r>
-              <a:rPr lang="en-US" dirty="0"/>
-              <a:t>Forgetting bias</a:t>
-            </a:r>
-          </a:p>
-          <a:p>
-            <a:r>
-              <a:rPr lang="en-US" dirty="0"/>
-              <a:t>Confusing dimensions</a:t>
-            </a:r>
-          </a:p>
-          <a:p>
-            <a:r>
-              <a:rPr lang="en-US" dirty="0"/>
-              <a:t>Applying wrong (or inappropriate) activation function</a:t>
-            </a:r>
-          </a:p>
-          <a:p>
-            <a:r>
-              <a:rPr lang="en-US" dirty="0"/>
-              <a:t>Bad learning rates</a:t>
-            </a:r>
-          </a:p>
-          <a:p>
-            <a:r>
-              <a:rPr lang="en-US" dirty="0"/>
-              <a:t>Check, check, and check again (and use LLMs to help)</a:t>
-            </a:r>
+            <a:endParaRPr lang="en-US"/>
           </a:p>
         </p:txBody>
       </p:sp>
       <p:sp>
         <p:nvSpPr>
-          <p:cNvPr id="4" name="Slide Number Placeholder 3">
-            <a:extLst>
-              <a:ext uri="{FF2B5EF4-FFF2-40B4-BE49-F238E27FC236}">
-                <a16:creationId xmlns:a16="http://schemas.microsoft.com/office/drawing/2014/main" id="{75A88B77-ED9D-ABB9-39DC-483248935775}"/>
+          <p:cNvPr id="4" name="Date Placeholder 3">
+            <a:extLst>
+              <a:ext uri="{FF2B5EF4-FFF2-40B4-BE49-F238E27FC236}">
+                <a16:creationId xmlns:a16="http://schemas.microsoft.com/office/drawing/2014/main" id="{47FA2B70-B521-07BA-D32A-B8489770273C}"/>
               </a:ext>
             </a:extLst>
           </p:cNvPr>
@@ -10258,7 +10610,7 @@
             <a:spLocks noGrp="1"/>
           </p:cNvSpPr>
           <p:nvPr>
-            <p:ph type="sldNum" sz="quarter" idx="12"/>
+            <p:ph type="dt" sz="half" idx="10"/>
           </p:nvPr>
         </p:nvSpPr>
         <p:spPr/>
@@ -10266,18 +10618,49 @@
           <a:bodyPr/>
           <a:lstStyle/>
           <a:p>
-            <a:fld id="{8E65201D-48DB-3B45-ABC2-018B1E66F34C}" type="slidenum">
-              <a:rPr lang="en-US" smtClean="0"/>
-              <a:t>21</a:t>
+            <a:fld id="{16F2FB5F-D553-C945-B874-A642CC0C851F}" type="datetime3">
+              <a:rPr lang="en-IE" smtClean="0"/>
+              <a:pPr/>
+              <a:t>15 February 2026</a:t>
             </a:fld>
-            <a:endParaRPr lang="en-US"/>
+            <a:endParaRPr lang="en-US" dirty="0"/>
           </a:p>
         </p:txBody>
       </p:sp>
+      <p:pic>
+        <p:nvPicPr>
+          <p:cNvPr id="6" name="slide.url=https://www.polleverywhere.com/multiple_choice_polls/jiILwRZI4f4Fp2NGhvLKg?state=opened&amp;flow=Default&amp;onscreen=persist">
+            <a:extLst>
+              <a:ext uri="{FF2B5EF4-FFF2-40B4-BE49-F238E27FC236}">
+                <a16:creationId xmlns:a16="http://schemas.microsoft.com/office/drawing/2014/main" id="{D61599CA-25F4-FDA0-DD6B-0C249357D896}"/>
+              </a:ext>
+            </a:extLst>
+          </p:cNvPr>
+          <p:cNvPicPr>
+            <a:picLocks/>
+          </p:cNvPicPr>
+          <p:nvPr/>
+        </p:nvPicPr>
+        <p:blipFill>
+          <a:blip r:embed="rId3"/>
+          <a:stretch>
+            <a:fillRect/>
+          </a:stretch>
+        </p:blipFill>
+        <p:spPr>
+          <a:xfrm>
+            <a:off x="63500" y="63500"/>
+            <a:ext cx="12065000" cy="6731000"/>
+          </a:xfrm>
+          <a:prstGeom prst="rect">
+            <a:avLst/>
+          </a:prstGeom>
+        </p:spPr>
+      </p:pic>
     </p:spTree>
     <p:extLst>
       <p:ext uri="{BB962C8B-B14F-4D97-AF65-F5344CB8AC3E}">
-        <p14:creationId xmlns:p14="http://schemas.microsoft.com/office/powerpoint/2010/main" val="345379545"/>
+        <p14:creationId xmlns:p14="http://schemas.microsoft.com/office/powerpoint/2010/main" val="3577787994"/>
       </p:ext>
     </p:extLst>
   </p:cSld>
@@ -10309,7 +10692,7 @@
           <p:cNvPr id="2" name="Title 1">
             <a:extLst>
               <a:ext uri="{FF2B5EF4-FFF2-40B4-BE49-F238E27FC236}">
-                <a16:creationId xmlns:a16="http://schemas.microsoft.com/office/drawing/2014/main" id="{1613F17F-746B-E667-3B63-9BDAFFC59948}"/>
+                <a16:creationId xmlns:a16="http://schemas.microsoft.com/office/drawing/2014/main" id="{C98E2C95-7A9E-1651-5A0E-7DA473F917E2}"/>
               </a:ext>
             </a:extLst>
           </p:cNvPr>
@@ -10317,7 +10700,7 @@
             <a:spLocks noGrp="1"/>
           </p:cNvSpPr>
           <p:nvPr>
-            <p:ph type="title"/>
+            <p:ph type="ctrTitle"/>
           </p:nvPr>
         </p:nvSpPr>
         <p:spPr/>
@@ -10325,19 +10708,16 @@
           <a:bodyPr/>
           <a:lstStyle/>
           <a:p>
-            <a:r>
-              <a:rPr lang="en-US" dirty="0"/>
-              <a:t>A neural network for weather data</a:t>
-            </a:r>
+            <a:endParaRPr lang="en-US"/>
           </a:p>
         </p:txBody>
       </p:sp>
       <p:sp>
         <p:nvSpPr>
-          <p:cNvPr id="3" name="Content Placeholder 2">
-            <a:extLst>
-              <a:ext uri="{FF2B5EF4-FFF2-40B4-BE49-F238E27FC236}">
-                <a16:creationId xmlns:a16="http://schemas.microsoft.com/office/drawing/2014/main" id="{195283CA-66FE-1EA0-67BE-FCA3BAEE5DD5}"/>
+          <p:cNvPr id="3" name="Subtitle 2">
+            <a:extLst>
+              <a:ext uri="{FF2B5EF4-FFF2-40B4-BE49-F238E27FC236}">
+                <a16:creationId xmlns:a16="http://schemas.microsoft.com/office/drawing/2014/main" id="{F4C770F7-B2C1-C990-B4D4-E36BAC2FFCB7}"/>
               </a:ext>
             </a:extLst>
           </p:cNvPr>
@@ -10345,65 +10725,7 @@
             <a:spLocks noGrp="1"/>
           </p:cNvSpPr>
           <p:nvPr>
-            <p:ph idx="1"/>
-          </p:nvPr>
-        </p:nvSpPr>
-        <p:spPr/>
-        <p:txBody>
-          <a:bodyPr>
-            <a:normAutofit lnSpcReduction="10000"/>
-          </a:bodyPr>
-          <a:lstStyle/>
-          <a:p>
-            <a:r>
-              <a:rPr lang="en-US" dirty="0"/>
-              <a:t>Inputs = today’s temperature, humidity, wind speed...</a:t>
-            </a:r>
-          </a:p>
-          <a:p>
-            <a:r>
-              <a:rPr lang="en-US" dirty="0"/>
-              <a:t>Outputs = tomorrow’s temperature, humidity, wind speed</a:t>
-            </a:r>
-          </a:p>
-          <a:p>
-            <a:r>
-              <a:rPr lang="en-US" dirty="0"/>
-              <a:t>NNs can learn the spatial and temporal patterns</a:t>
-            </a:r>
-          </a:p>
-          <a:p>
-            <a:r>
-              <a:rPr lang="en-US" dirty="0"/>
-              <a:t>Next lecture: discover how NNs learn the weights and the biases from data</a:t>
-            </a:r>
-          </a:p>
-          <a:p>
-            <a:r>
-              <a:rPr lang="en-IE" dirty="0"/>
-              <a:t>In real-world NNs there are many neurons at different layers of the architecture. Each has its own </a:t>
-            </a:r>
-            <a:r>
-              <a:rPr lang="en-US" dirty="0"/>
-              <a:t>weights and biases</a:t>
-            </a:r>
-          </a:p>
-        </p:txBody>
-      </p:sp>
-      <p:sp>
-        <p:nvSpPr>
-          <p:cNvPr id="4" name="Slide Number Placeholder 3">
-            <a:extLst>
-              <a:ext uri="{FF2B5EF4-FFF2-40B4-BE49-F238E27FC236}">
-                <a16:creationId xmlns:a16="http://schemas.microsoft.com/office/drawing/2014/main" id="{8A8AFC83-215F-7FA4-27C2-4A899B65E26B}"/>
-              </a:ext>
-            </a:extLst>
-          </p:cNvPr>
-          <p:cNvSpPr>
-            <a:spLocks noGrp="1"/>
-          </p:cNvSpPr>
-          <p:nvPr>
-            <p:ph type="sldNum" sz="quarter" idx="12"/>
+            <p:ph type="subTitle" idx="1"/>
           </p:nvPr>
         </p:nvSpPr>
         <p:spPr/>
@@ -10411,18 +10733,74 @@
           <a:bodyPr/>
           <a:lstStyle/>
           <a:p>
-            <a:fld id="{8E65201D-48DB-3B45-ABC2-018B1E66F34C}" type="slidenum">
-              <a:rPr lang="en-US" smtClean="0"/>
-              <a:t>22</a:t>
-            </a:fld>
             <a:endParaRPr lang="en-US"/>
           </a:p>
         </p:txBody>
       </p:sp>
+      <p:sp>
+        <p:nvSpPr>
+          <p:cNvPr id="4" name="Date Placeholder 3">
+            <a:extLst>
+              <a:ext uri="{FF2B5EF4-FFF2-40B4-BE49-F238E27FC236}">
+                <a16:creationId xmlns:a16="http://schemas.microsoft.com/office/drawing/2014/main" id="{A3CBB7F3-D3D9-C1A4-9B26-447320D451C7}"/>
+              </a:ext>
+            </a:extLst>
+          </p:cNvPr>
+          <p:cNvSpPr>
+            <a:spLocks noGrp="1"/>
+          </p:cNvSpPr>
+          <p:nvPr>
+            <p:ph type="dt" sz="half" idx="10"/>
+          </p:nvPr>
+        </p:nvSpPr>
+        <p:spPr/>
+        <p:txBody>
+          <a:bodyPr/>
+          <a:lstStyle/>
+          <a:p>
+            <a:fld id="{16F2FB5F-D553-C945-B874-A642CC0C851F}" type="datetime3">
+              <a:rPr lang="en-IE" smtClean="0"/>
+              <a:pPr/>
+              <a:t>15 February 2026</a:t>
+            </a:fld>
+            <a:endParaRPr lang="en-US" dirty="0"/>
+          </a:p>
+        </p:txBody>
+      </p:sp>
+      <p:pic>
+        <p:nvPicPr>
+          <p:cNvPr id="6" name="slide.url=https://www.polleverywhere.com/multiple_choice_polls/0DiaqtZCrsQQdBoL8wxjR?state=opened&amp;flow=Default&amp;onscreen=persist">
+            <a:extLst>
+              <a:ext uri="{FF2B5EF4-FFF2-40B4-BE49-F238E27FC236}">
+                <a16:creationId xmlns:a16="http://schemas.microsoft.com/office/drawing/2014/main" id="{A13C32CE-E891-714A-B30D-01D1EBBE22C7}"/>
+              </a:ext>
+            </a:extLst>
+          </p:cNvPr>
+          <p:cNvPicPr>
+            <a:picLocks/>
+          </p:cNvPicPr>
+          <p:nvPr/>
+        </p:nvPicPr>
+        <p:blipFill>
+          <a:blip r:embed="rId3"/>
+          <a:stretch>
+            <a:fillRect/>
+          </a:stretch>
+        </p:blipFill>
+        <p:spPr>
+          <a:xfrm>
+            <a:off x="63500" y="63500"/>
+            <a:ext cx="12065000" cy="6731000"/>
+          </a:xfrm>
+          <a:prstGeom prst="rect">
+            <a:avLst/>
+          </a:prstGeom>
+        </p:spPr>
+      </p:pic>
     </p:spTree>
     <p:extLst>
       <p:ext uri="{BB962C8B-B14F-4D97-AF65-F5344CB8AC3E}">
-        <p14:creationId xmlns:p14="http://schemas.microsoft.com/office/powerpoint/2010/main" val="2447611132"/>
+        <p14:creationId xmlns:p14="http://schemas.microsoft.com/office/powerpoint/2010/main" val="827996372"/>
       </p:ext>
     </p:extLst>
   </p:cSld>
@@ -10454,7 +10832,7 @@
           <p:cNvPr id="2" name="Title 1">
             <a:extLst>
               <a:ext uri="{FF2B5EF4-FFF2-40B4-BE49-F238E27FC236}">
-                <a16:creationId xmlns:a16="http://schemas.microsoft.com/office/drawing/2014/main" id="{590518CF-589F-36E6-7720-D982CED5BB98}"/>
+                <a16:creationId xmlns:a16="http://schemas.microsoft.com/office/drawing/2014/main" id="{5A499AFC-C4A5-6623-D6A1-C3D2BF4B203B}"/>
               </a:ext>
             </a:extLst>
           </p:cNvPr>
@@ -10472,7 +10850,7 @@
           <a:p>
             <a:r>
               <a:rPr lang="en-US" dirty="0"/>
-              <a:t>Next class: training</a:t>
+              <a:t>Common pitfalls</a:t>
             </a:r>
           </a:p>
         </p:txBody>
@@ -10482,7 +10860,7 @@
           <p:cNvPr id="3" name="Content Placeholder 2">
             <a:extLst>
               <a:ext uri="{FF2B5EF4-FFF2-40B4-BE49-F238E27FC236}">
-                <a16:creationId xmlns:a16="http://schemas.microsoft.com/office/drawing/2014/main" id="{0BD1E2CA-EDCA-E515-16D1-FF9E2DA8CAE4}"/>
+                <a16:creationId xmlns:a16="http://schemas.microsoft.com/office/drawing/2014/main" id="{2444770E-3C97-6C94-66DF-E608F3577706}"/>
               </a:ext>
             </a:extLst>
           </p:cNvPr>
@@ -10495,26 +10873,36 @@
         </p:nvSpPr>
         <p:spPr/>
         <p:txBody>
-          <a:bodyPr>
-            <a:normAutofit/>
-          </a:bodyPr>
+          <a:bodyPr/>
           <a:lstStyle/>
           <a:p>
             <a:r>
               <a:rPr lang="en-US" dirty="0"/>
-              <a:t>So far: forward pass only. i.e. taking weights and biases, and getting to the outputs</a:t>
+              <a:t>Forgetting bias</a:t>
             </a:r>
           </a:p>
           <a:p>
             <a:r>
               <a:rPr lang="en-US" dirty="0"/>
-              <a:t>Next: how do we learn weights?</a:t>
+              <a:t>Confusing dimensions</a:t>
             </a:r>
           </a:p>
           <a:p>
             <a:r>
               <a:rPr lang="en-US" dirty="0"/>
-              <a:t>Concepts of loss, gradients, updates</a:t>
+              <a:t>Applying wrong (or inappropriate) activation function</a:t>
+            </a:r>
+          </a:p>
+          <a:p>
+            <a:r>
+              <a:rPr lang="en-US" dirty="0"/>
+              <a:t>Bad learning rates</a:t>
+            </a:r>
+          </a:p>
+          <a:p>
+            <a:r>
+              <a:rPr lang="en-US" dirty="0"/>
+              <a:t>Check, check, and check again (and use LLMs to help)</a:t>
             </a:r>
           </a:p>
         </p:txBody>
@@ -10524,7 +10912,7 @@
           <p:cNvPr id="4" name="Slide Number Placeholder 3">
             <a:extLst>
               <a:ext uri="{FF2B5EF4-FFF2-40B4-BE49-F238E27FC236}">
-                <a16:creationId xmlns:a16="http://schemas.microsoft.com/office/drawing/2014/main" id="{45832799-2A24-F49A-CEB4-96F76E35E707}"/>
+                <a16:creationId xmlns:a16="http://schemas.microsoft.com/office/drawing/2014/main" id="{75A88B77-ED9D-ABB9-39DC-483248935775}"/>
               </a:ext>
             </a:extLst>
           </p:cNvPr>
@@ -10551,7 +10939,7 @@
     </p:spTree>
     <p:extLst>
       <p:ext uri="{BB962C8B-B14F-4D97-AF65-F5344CB8AC3E}">
-        <p14:creationId xmlns:p14="http://schemas.microsoft.com/office/powerpoint/2010/main" val="2545315002"/>
+        <p14:creationId xmlns:p14="http://schemas.microsoft.com/office/powerpoint/2010/main" val="345379545"/>
       </p:ext>
     </p:extLst>
   </p:cSld>
@@ -10583,7 +10971,7 @@
           <p:cNvPr id="2" name="Title 1">
             <a:extLst>
               <a:ext uri="{FF2B5EF4-FFF2-40B4-BE49-F238E27FC236}">
-                <a16:creationId xmlns:a16="http://schemas.microsoft.com/office/drawing/2014/main" id="{C612F52A-9D3D-9F47-5EE5-8C0B23884DC4}"/>
+                <a16:creationId xmlns:a16="http://schemas.microsoft.com/office/drawing/2014/main" id="{1613F17F-746B-E667-3B63-9BDAFFC59948}"/>
               </a:ext>
             </a:extLst>
           </p:cNvPr>
@@ -10601,7 +10989,7 @@
           <a:p>
             <a:r>
               <a:rPr lang="en-US" dirty="0"/>
-              <a:t>Summary</a:t>
+              <a:t>A neural network for weather data</a:t>
             </a:r>
           </a:p>
         </p:txBody>
@@ -10611,7 +10999,7 @@
           <p:cNvPr id="3" name="Content Placeholder 2">
             <a:extLst>
               <a:ext uri="{FF2B5EF4-FFF2-40B4-BE49-F238E27FC236}">
-                <a16:creationId xmlns:a16="http://schemas.microsoft.com/office/drawing/2014/main" id="{C66DCF8C-8F21-6B68-1EFF-48ED27F0ADBC}"/>
+                <a16:creationId xmlns:a16="http://schemas.microsoft.com/office/drawing/2014/main" id="{195283CA-66FE-1EA0-67BE-FCA3BAEE5DD5}"/>
               </a:ext>
             </a:extLst>
           </p:cNvPr>
@@ -10625,45 +11013,41 @@
         <p:spPr/>
         <p:txBody>
           <a:bodyPr>
-            <a:normAutofit lnSpcReduction="10000"/>
+            <a:normAutofit/>
           </a:bodyPr>
           <a:lstStyle/>
           <a:p>
             <a:r>
               <a:rPr lang="en-US" dirty="0"/>
-              <a:t>A neural network is just a fancy linear regression with extra hidden nodes</a:t>
+              <a:t>Inputs = today’s temperature, humidity, wind speed...</a:t>
             </a:r>
           </a:p>
           <a:p>
             <a:r>
               <a:rPr lang="en-US" dirty="0"/>
-              <a:t>These hidden nodes can capture much more flexible </a:t>
-            </a:r>
-            <a:r>
-              <a:rPr lang="en-US" dirty="0" err="1"/>
-              <a:t>behaviour</a:t>
-            </a:r>
+              <a:t>Outputs = temperature, humidity, wind speed in 6h</a:t>
+            </a:r>
+          </a:p>
+          <a:p>
             <a:r>
               <a:rPr lang="en-US" dirty="0"/>
-              <a:t> than the basic LR</a:t>
+              <a:t>NNs can learn the spatial and temporal patterns</a:t>
             </a:r>
           </a:p>
           <a:p>
             <a:r>
               <a:rPr lang="en-US" dirty="0"/>
-              <a:t>Most of the (forward) calculations are just matrix multiplication of weights and biases</a:t>
-            </a:r>
-          </a:p>
-          <a:p>
+              <a:t>Next lecture: discover how NNs learn the weights and the biases from data</a:t>
+            </a:r>
+          </a:p>
+          <a:p>
+            <a:r>
+              <a:rPr lang="en-IE" dirty="0"/>
+              <a:t>In real-world NNs there are many neurons at different layers of the architecture. Each has its own </a:t>
+            </a:r>
             <a:r>
               <a:rPr lang="en-US" dirty="0"/>
-              <a:t>We use activation functions to allow more flexibility (and especially sparsity) in the way the values are modelled</a:t>
-            </a:r>
-          </a:p>
-          <a:p>
-            <a:r>
-              <a:rPr lang="en-US" dirty="0"/>
-              <a:t>Tomorrow: how do we estimate the weights? </a:t>
+              <a:t>weights and biases</a:t>
             </a:r>
           </a:p>
         </p:txBody>
@@ -10673,7 +11057,7 @@
           <p:cNvPr id="4" name="Slide Number Placeholder 3">
             <a:extLst>
               <a:ext uri="{FF2B5EF4-FFF2-40B4-BE49-F238E27FC236}">
-                <a16:creationId xmlns:a16="http://schemas.microsoft.com/office/drawing/2014/main" id="{1A777BFB-75BB-82D2-9ACA-EE3C00E6E9BE}"/>
+                <a16:creationId xmlns:a16="http://schemas.microsoft.com/office/drawing/2014/main" id="{8A8AFC83-215F-7FA4-27C2-4A899B65E26B}"/>
               </a:ext>
             </a:extLst>
           </p:cNvPr>
@@ -10700,7 +11084,7 @@
     </p:spTree>
     <p:extLst>
       <p:ext uri="{BB962C8B-B14F-4D97-AF65-F5344CB8AC3E}">
-        <p14:creationId xmlns:p14="http://schemas.microsoft.com/office/powerpoint/2010/main" val="392311603"/>
+        <p14:creationId xmlns:p14="http://schemas.microsoft.com/office/powerpoint/2010/main" val="2447611132"/>
       </p:ext>
     </p:extLst>
   </p:cSld>
@@ -10732,6 +11116,284 @@
           <p:cNvPr id="2" name="Title 1">
             <a:extLst>
               <a:ext uri="{FF2B5EF4-FFF2-40B4-BE49-F238E27FC236}">
+                <a16:creationId xmlns:a16="http://schemas.microsoft.com/office/drawing/2014/main" id="{590518CF-589F-36E6-7720-D982CED5BB98}"/>
+              </a:ext>
+            </a:extLst>
+          </p:cNvPr>
+          <p:cNvSpPr>
+            <a:spLocks noGrp="1"/>
+          </p:cNvSpPr>
+          <p:nvPr>
+            <p:ph type="title"/>
+          </p:nvPr>
+        </p:nvSpPr>
+        <p:spPr/>
+        <p:txBody>
+          <a:bodyPr/>
+          <a:lstStyle/>
+          <a:p>
+            <a:r>
+              <a:rPr lang="en-US" dirty="0"/>
+              <a:t>Next class: training</a:t>
+            </a:r>
+          </a:p>
+        </p:txBody>
+      </p:sp>
+      <p:sp>
+        <p:nvSpPr>
+          <p:cNvPr id="3" name="Content Placeholder 2">
+            <a:extLst>
+              <a:ext uri="{FF2B5EF4-FFF2-40B4-BE49-F238E27FC236}">
+                <a16:creationId xmlns:a16="http://schemas.microsoft.com/office/drawing/2014/main" id="{0BD1E2CA-EDCA-E515-16D1-FF9E2DA8CAE4}"/>
+              </a:ext>
+            </a:extLst>
+          </p:cNvPr>
+          <p:cNvSpPr>
+            <a:spLocks noGrp="1"/>
+          </p:cNvSpPr>
+          <p:nvPr>
+            <p:ph idx="1"/>
+          </p:nvPr>
+        </p:nvSpPr>
+        <p:spPr/>
+        <p:txBody>
+          <a:bodyPr>
+            <a:normAutofit/>
+          </a:bodyPr>
+          <a:lstStyle/>
+          <a:p>
+            <a:r>
+              <a:rPr lang="en-US" dirty="0"/>
+              <a:t>So far: forward pass only. i.e. taking weights and biases, and getting to the outputs</a:t>
+            </a:r>
+          </a:p>
+          <a:p>
+            <a:r>
+              <a:rPr lang="en-US" dirty="0"/>
+              <a:t>Next: how do we learn weights?</a:t>
+            </a:r>
+          </a:p>
+          <a:p>
+            <a:r>
+              <a:rPr lang="en-US" dirty="0"/>
+              <a:t>Concepts of loss, gradients, updates</a:t>
+            </a:r>
+          </a:p>
+        </p:txBody>
+      </p:sp>
+      <p:sp>
+        <p:nvSpPr>
+          <p:cNvPr id="4" name="Slide Number Placeholder 3">
+            <a:extLst>
+              <a:ext uri="{FF2B5EF4-FFF2-40B4-BE49-F238E27FC236}">
+                <a16:creationId xmlns:a16="http://schemas.microsoft.com/office/drawing/2014/main" id="{45832799-2A24-F49A-CEB4-96F76E35E707}"/>
+              </a:ext>
+            </a:extLst>
+          </p:cNvPr>
+          <p:cNvSpPr>
+            <a:spLocks noGrp="1"/>
+          </p:cNvSpPr>
+          <p:nvPr>
+            <p:ph type="sldNum" sz="quarter" idx="12"/>
+          </p:nvPr>
+        </p:nvSpPr>
+        <p:spPr/>
+        <p:txBody>
+          <a:bodyPr/>
+          <a:lstStyle/>
+          <a:p>
+            <a:fld id="{8E65201D-48DB-3B45-ABC2-018B1E66F34C}" type="slidenum">
+              <a:rPr lang="en-US" smtClean="0"/>
+              <a:t>25</a:t>
+            </a:fld>
+            <a:endParaRPr lang="en-US"/>
+          </a:p>
+        </p:txBody>
+      </p:sp>
+    </p:spTree>
+    <p:extLst>
+      <p:ext uri="{BB962C8B-B14F-4D97-AF65-F5344CB8AC3E}">
+        <p14:creationId xmlns:p14="http://schemas.microsoft.com/office/powerpoint/2010/main" val="2545315002"/>
+      </p:ext>
+    </p:extLst>
+  </p:cSld>
+  <p:clrMapOvr>
+    <a:masterClrMapping/>
+  </p:clrMapOvr>
+</p:sld>
+</file>
+
+<file path=ppt/slides/slide26.xml><?xml version="1.0" encoding="utf-8"?>
+<p:sld xmlns:a="http://schemas.openxmlformats.org/drawingml/2006/main" xmlns:r="http://schemas.openxmlformats.org/officeDocument/2006/relationships" xmlns:p="http://schemas.openxmlformats.org/presentationml/2006/main">
+  <p:cSld>
+    <p:spTree>
+      <p:nvGrpSpPr>
+        <p:cNvPr id="1" name=""/>
+        <p:cNvGrpSpPr/>
+        <p:nvPr/>
+      </p:nvGrpSpPr>
+      <p:grpSpPr>
+        <a:xfrm>
+          <a:off x="0" y="0"/>
+          <a:ext cx="0" cy="0"/>
+          <a:chOff x="0" y="0"/>
+          <a:chExt cx="0" cy="0"/>
+        </a:xfrm>
+      </p:grpSpPr>
+      <p:sp>
+        <p:nvSpPr>
+          <p:cNvPr id="2" name="Title 1">
+            <a:extLst>
+              <a:ext uri="{FF2B5EF4-FFF2-40B4-BE49-F238E27FC236}">
+                <a16:creationId xmlns:a16="http://schemas.microsoft.com/office/drawing/2014/main" id="{C612F52A-9D3D-9F47-5EE5-8C0B23884DC4}"/>
+              </a:ext>
+            </a:extLst>
+          </p:cNvPr>
+          <p:cNvSpPr>
+            <a:spLocks noGrp="1"/>
+          </p:cNvSpPr>
+          <p:nvPr>
+            <p:ph type="title"/>
+          </p:nvPr>
+        </p:nvSpPr>
+        <p:spPr/>
+        <p:txBody>
+          <a:bodyPr/>
+          <a:lstStyle/>
+          <a:p>
+            <a:r>
+              <a:rPr lang="en-US" dirty="0"/>
+              <a:t>Summary</a:t>
+            </a:r>
+          </a:p>
+        </p:txBody>
+      </p:sp>
+      <p:sp>
+        <p:nvSpPr>
+          <p:cNvPr id="3" name="Content Placeholder 2">
+            <a:extLst>
+              <a:ext uri="{FF2B5EF4-FFF2-40B4-BE49-F238E27FC236}">
+                <a16:creationId xmlns:a16="http://schemas.microsoft.com/office/drawing/2014/main" id="{C66DCF8C-8F21-6B68-1EFF-48ED27F0ADBC}"/>
+              </a:ext>
+            </a:extLst>
+          </p:cNvPr>
+          <p:cNvSpPr>
+            <a:spLocks noGrp="1"/>
+          </p:cNvSpPr>
+          <p:nvPr>
+            <p:ph idx="1"/>
+          </p:nvPr>
+        </p:nvSpPr>
+        <p:spPr/>
+        <p:txBody>
+          <a:bodyPr>
+            <a:normAutofit lnSpcReduction="10000"/>
+          </a:bodyPr>
+          <a:lstStyle/>
+          <a:p>
+            <a:r>
+              <a:rPr lang="en-US" dirty="0"/>
+              <a:t>A neural network is just a fancy linear regression with extra hidden nodes</a:t>
+            </a:r>
+          </a:p>
+          <a:p>
+            <a:r>
+              <a:rPr lang="en-US" dirty="0"/>
+              <a:t>These hidden nodes can capture much more flexible </a:t>
+            </a:r>
+            <a:r>
+              <a:rPr lang="en-US" dirty="0" err="1"/>
+              <a:t>behaviour</a:t>
+            </a:r>
+            <a:r>
+              <a:rPr lang="en-US" dirty="0"/>
+              <a:t> than the basic LR</a:t>
+            </a:r>
+          </a:p>
+          <a:p>
+            <a:r>
+              <a:rPr lang="en-US" dirty="0"/>
+              <a:t>Most of the (forward) calculations are just matrix multiplication of weights and biases</a:t>
+            </a:r>
+          </a:p>
+          <a:p>
+            <a:r>
+              <a:rPr lang="en-US" dirty="0"/>
+              <a:t>We use activation functions to allow more flexibility (and especially sparsity) in the way the values are modelled</a:t>
+            </a:r>
+          </a:p>
+          <a:p>
+            <a:r>
+              <a:rPr lang="en-US" dirty="0"/>
+              <a:t>Tomorrow: how do we estimate the weights? </a:t>
+            </a:r>
+          </a:p>
+        </p:txBody>
+      </p:sp>
+      <p:sp>
+        <p:nvSpPr>
+          <p:cNvPr id="4" name="Slide Number Placeholder 3">
+            <a:extLst>
+              <a:ext uri="{FF2B5EF4-FFF2-40B4-BE49-F238E27FC236}">
+                <a16:creationId xmlns:a16="http://schemas.microsoft.com/office/drawing/2014/main" id="{1A777BFB-75BB-82D2-9ACA-EE3C00E6E9BE}"/>
+              </a:ext>
+            </a:extLst>
+          </p:cNvPr>
+          <p:cNvSpPr>
+            <a:spLocks noGrp="1"/>
+          </p:cNvSpPr>
+          <p:nvPr>
+            <p:ph type="sldNum" sz="quarter" idx="12"/>
+          </p:nvPr>
+        </p:nvSpPr>
+        <p:spPr/>
+        <p:txBody>
+          <a:bodyPr/>
+          <a:lstStyle/>
+          <a:p>
+            <a:fld id="{8E65201D-48DB-3B45-ABC2-018B1E66F34C}" type="slidenum">
+              <a:rPr lang="en-US" smtClean="0"/>
+              <a:t>26</a:t>
+            </a:fld>
+            <a:endParaRPr lang="en-US"/>
+          </a:p>
+        </p:txBody>
+      </p:sp>
+    </p:spTree>
+    <p:extLst>
+      <p:ext uri="{BB962C8B-B14F-4D97-AF65-F5344CB8AC3E}">
+        <p14:creationId xmlns:p14="http://schemas.microsoft.com/office/powerpoint/2010/main" val="392311603"/>
+      </p:ext>
+    </p:extLst>
+  </p:cSld>
+  <p:clrMapOvr>
+    <a:masterClrMapping/>
+  </p:clrMapOvr>
+</p:sld>
+</file>
+
+<file path=ppt/slides/slide27.xml><?xml version="1.0" encoding="utf-8"?>
+<p:sld xmlns:a="http://schemas.openxmlformats.org/drawingml/2006/main" xmlns:r="http://schemas.openxmlformats.org/officeDocument/2006/relationships" xmlns:p="http://schemas.openxmlformats.org/presentationml/2006/main">
+  <p:cSld>
+    <p:spTree>
+      <p:nvGrpSpPr>
+        <p:cNvPr id="1" name=""/>
+        <p:cNvGrpSpPr/>
+        <p:nvPr/>
+      </p:nvGrpSpPr>
+      <p:grpSpPr>
+        <a:xfrm>
+          <a:off x="0" y="0"/>
+          <a:ext cx="0" cy="0"/>
+          <a:chOff x="0" y="0"/>
+          <a:chExt cx="0" cy="0"/>
+        </a:xfrm>
+      </p:grpSpPr>
+      <p:sp>
+        <p:nvSpPr>
+          <p:cNvPr id="2" name="Title 1">
+            <a:extLst>
+              <a:ext uri="{FF2B5EF4-FFF2-40B4-BE49-F238E27FC236}">
                 <a16:creationId xmlns:a16="http://schemas.microsoft.com/office/drawing/2014/main" id="{5272E10E-525F-42F7-F943-C6C1FF1B7CC1}"/>
               </a:ext>
             </a:extLst>
@@ -10803,7 +11465,7 @@
 </p:sld>
 </file>
 
-<file path=ppt/slides/slide26.xml><?xml version="1.0" encoding="utf-8"?>
+<file path=ppt/slides/slide28.xml><?xml version="1.0" encoding="utf-8"?>
 <p:sld xmlns:a="http://schemas.openxmlformats.org/drawingml/2006/main" xmlns:r="http://schemas.openxmlformats.org/officeDocument/2006/relationships" xmlns:p="http://schemas.openxmlformats.org/presentationml/2006/main">
   <p:cSld>
     <p:spTree>
@@ -10873,12 +11535,12 @@
         <p:spPr>
           <a:xfrm>
             <a:off x="838200" y="2306350"/>
-            <a:ext cx="5257800" cy="4073347"/>
+            <a:ext cx="4682067" cy="4073347"/>
           </a:xfrm>
         </p:spPr>
         <p:txBody>
           <a:bodyPr>
-            <a:normAutofit fontScale="92500" lnSpcReduction="20000"/>
+            <a:normAutofit fontScale="77500" lnSpcReduction="20000"/>
           </a:bodyPr>
           <a:lstStyle/>
           <a:p>
@@ -10888,7 +11550,7 @@
             </a:pPr>
             <a:r>
               <a:rPr lang="en-US" dirty="0"/>
-              <a:t>Go and read in detail one of the following three papers:</a:t>
+              <a:t>Go and read in detail one of the following three papers*:</a:t>
             </a:r>
           </a:p>
           <a:p>
@@ -10997,10 +11659,54 @@
             </a:endParaRPr>
           </a:p>
           <a:p>
-            <a:pPr marL="514350" indent="-514350">
-              <a:buFont typeface="+mj-lt"/>
-              <a:buAutoNum type="arabicPeriod"/>
-            </a:pPr>
+            <a:r>
+              <a:rPr lang="en-US" dirty="0"/>
+              <a:t>(Or look here: </a:t>
+            </a:r>
+            <a:r>
+              <a:rPr lang="en-US" dirty="0">
+                <a:latin typeface="Courier New" panose="02070309020205020404" pitchFamily="49" charset="0"/>
+                <a:cs typeface="Courier New" panose="02070309020205020404" pitchFamily="49" charset="0"/>
+              </a:rPr>
+              <a:t>https://</a:t>
+            </a:r>
+            <a:r>
+              <a:rPr lang="en-US" dirty="0" err="1">
+                <a:latin typeface="Courier New" panose="02070309020205020404" pitchFamily="49" charset="0"/>
+                <a:cs typeface="Courier New" panose="02070309020205020404" pitchFamily="49" charset="0"/>
+              </a:rPr>
+              <a:t>github.com</a:t>
+            </a:r>
+            <a:r>
+              <a:rPr lang="en-US" dirty="0">
+                <a:latin typeface="Courier New" panose="02070309020205020404" pitchFamily="49" charset="0"/>
+                <a:cs typeface="Courier New" panose="02070309020205020404" pitchFamily="49" charset="0"/>
+              </a:rPr>
+              <a:t>/</a:t>
+            </a:r>
+            <a:r>
+              <a:rPr lang="en-US" dirty="0" err="1">
+                <a:latin typeface="Courier New" panose="02070309020205020404" pitchFamily="49" charset="0"/>
+                <a:cs typeface="Courier New" panose="02070309020205020404" pitchFamily="49" charset="0"/>
+              </a:rPr>
+              <a:t>jaychempan</a:t>
+            </a:r>
+            <a:r>
+              <a:rPr lang="en-US" dirty="0">
+                <a:latin typeface="Courier New" panose="02070309020205020404" pitchFamily="49" charset="0"/>
+                <a:cs typeface="Courier New" panose="02070309020205020404" pitchFamily="49" charset="0"/>
+              </a:rPr>
+              <a:t>/Awesome-LWMs</a:t>
+            </a:r>
+            <a:r>
+              <a:rPr lang="en-US" dirty="0"/>
+              <a:t>)</a:t>
+            </a:r>
+          </a:p>
+          <a:p>
+            <a:endParaRPr lang="en-US" dirty="0"/>
+          </a:p>
+          <a:p>
             <a:endParaRPr lang="en-US" dirty="0"/>
           </a:p>
         </p:txBody>
@@ -11090,7 +11796,15 @@
               <a:p>
                 <a:r>
                   <a:rPr lang="en-US" dirty="0"/>
-                  <a:t>A neural network generalizes the linear regression model we met in the previous class:</a:t>
+                  <a:t>A neural network </a:t>
+                </a:r>
+                <a:r>
+                  <a:rPr lang="en-US" dirty="0" err="1"/>
+                  <a:t>generalises</a:t>
+                </a:r>
+                <a:r>
+                  <a:rPr lang="en-US" dirty="0"/>
+                  <a:t> the linear regression model we met in the previous class:</a:t>
                 </a:r>
               </a:p>
               <a:p>
@@ -11204,7 +11918,7 @@
               <a:blipFill>
                 <a:blip r:embed="rId2"/>
                 <a:stretch>
-                  <a:fillRect l="-1315" t="-2496" r="-146"/>
+                  <a:fillRect l="-1368" t="-2439" r="-152"/>
                 </a:stretch>
               </a:blipFill>
             </p:spPr>
@@ -11213,7 +11927,7 @@
               <a:lstStyle/>
               <a:p>
                 <a:r>
-                  <a:rPr lang="en-IE">
+                  <a:rPr lang="en-US">
                     <a:noFill/>
                   </a:rPr>
                   <a:t> </a:t>
@@ -11468,7 +12182,7 @@
                 </a14:m>
                 <a:r>
                   <a:rPr lang="en-IE" dirty="0"/>
-                  <a:t>, then add bias </a:t>
+                  <a:t>, and add bias </a:t>
                 </a:r>
                 <a14:m>
                   <m:oMath xmlns:m="http://schemas.openxmlformats.org/officeDocument/2006/math">
@@ -11552,7 +12266,7 @@
               <a:blipFill>
                 <a:blip r:embed="rId2"/>
                 <a:stretch>
-                  <a:fillRect l="-1368" t="-2439"/>
+                  <a:fillRect l="-1368" t="-2439" r="-1824"/>
                 </a:stretch>
               </a:blipFill>
             </p:spPr>
@@ -12079,10 +12793,6 @@
                   <a:rPr lang="en-IE" dirty="0"/>
                   <a:t>Suppose </a:t>
                 </a:r>
-                <a:r>
-                  <a:rPr lang="en-US" dirty="0"/>
-                  <a:t>so </a:t>
-                </a:r>
                 <a14:m>
                   <m:oMath xmlns:m="http://schemas.openxmlformats.org/officeDocument/2006/math">
                     <m:r>
@@ -12293,7 +13003,7 @@
               <a:blipFill>
                 <a:blip r:embed="rId2"/>
                 <a:stretch>
-                  <a:fillRect l="-1086" t="-4942"/>
+                  <a:fillRect l="-1368" t="-5183"/>
                 </a:stretch>
               </a:blipFill>
             </p:spPr>

--- a/slides/day 1/D1C2_LR_introANNs.pptx
+++ b/slides/day 1/D1C2_LR_introANNs.pptx
@@ -224,7 +224,7 @@
           <a:p>
             <a:fld id="{FF5685EE-3D40-0A4E-BB88-46887330FC0A}" type="datetimeFigureOut">
               <a:rPr lang="en-US" smtClean="0"/>
-              <a:t>2/15/26</a:t>
+              <a:t>2/23/26</a:t>
             </a:fld>
             <a:endParaRPr lang="en-US"/>
           </a:p>
@@ -536,6 +536,258 @@
           <a:bodyPr/>
           <a:lstStyle/>
           <a:p>
+            <a:endParaRPr lang="en-US"/>
+          </a:p>
+        </p:txBody>
+      </p:sp>
+      <p:sp>
+        <p:nvSpPr>
+          <p:cNvPr id="4" name="Slide Number Placeholder 3"/>
+          <p:cNvSpPr>
+            <a:spLocks noGrp="1"/>
+          </p:cNvSpPr>
+          <p:nvPr>
+            <p:ph type="sldNum" sz="quarter" idx="5"/>
+          </p:nvPr>
+        </p:nvSpPr>
+        <p:spPr/>
+        <p:txBody>
+          <a:bodyPr/>
+          <a:lstStyle/>
+          <a:p>
+            <a:fld id="{30752F2A-FA59-1746-ABA5-28C394E5ED08}" type="slidenum">
+              <a:rPr lang="en-US" smtClean="0"/>
+              <a:t>1</a:t>
+            </a:fld>
+            <a:endParaRPr lang="en-US"/>
+          </a:p>
+        </p:txBody>
+      </p:sp>
+    </p:spTree>
+    <p:extLst>
+      <p:ext uri="{BB962C8B-B14F-4D97-AF65-F5344CB8AC3E}">
+        <p14:creationId xmlns:p14="http://schemas.microsoft.com/office/powerpoint/2010/main" val="4187317151"/>
+      </p:ext>
+    </p:extLst>
+  </p:cSld>
+  <p:clrMapOvr>
+    <a:masterClrMapping/>
+  </p:clrMapOvr>
+</p:notes>
+</file>
+
+<file path=ppt/notesSlides/notesSlide10.xml><?xml version="1.0" encoding="utf-8"?>
+<p:notes xmlns:a="http://schemas.openxmlformats.org/drawingml/2006/main" xmlns:r="http://schemas.openxmlformats.org/officeDocument/2006/relationships" xmlns:p="http://schemas.openxmlformats.org/presentationml/2006/main">
+  <p:cSld>
+    <p:spTree>
+      <p:nvGrpSpPr>
+        <p:cNvPr id="1" name=""/>
+        <p:cNvGrpSpPr/>
+        <p:nvPr/>
+      </p:nvGrpSpPr>
+      <p:grpSpPr>
+        <a:xfrm>
+          <a:off x="0" y="0"/>
+          <a:ext cx="0" cy="0"/>
+          <a:chOff x="0" y="0"/>
+          <a:chExt cx="0" cy="0"/>
+        </a:xfrm>
+      </p:grpSpPr>
+      <p:sp>
+        <p:nvSpPr>
+          <p:cNvPr id="2" name="Slide Image Placeholder 1"/>
+          <p:cNvSpPr>
+            <a:spLocks noGrp="1" noRot="1" noChangeAspect="1"/>
+          </p:cNvSpPr>
+          <p:nvPr>
+            <p:ph type="sldImg"/>
+          </p:nvPr>
+        </p:nvSpPr>
+        <p:spPr/>
+      </p:sp>
+      <p:sp>
+        <p:nvSpPr>
+          <p:cNvPr id="3" name="Notes Placeholder 2"/>
+          <p:cNvSpPr>
+            <a:spLocks noGrp="1"/>
+          </p:cNvSpPr>
+          <p:nvPr>
+            <p:ph type="body" idx="1"/>
+          </p:nvPr>
+        </p:nvSpPr>
+        <p:spPr/>
+        <p:txBody>
+          <a:bodyPr/>
+          <a:lstStyle/>
+          <a:p>
+            <a:endParaRPr lang="en-US"/>
+          </a:p>
+        </p:txBody>
+      </p:sp>
+      <p:sp>
+        <p:nvSpPr>
+          <p:cNvPr id="4" name="Slide Number Placeholder 3"/>
+          <p:cNvSpPr>
+            <a:spLocks noGrp="1"/>
+          </p:cNvSpPr>
+          <p:nvPr>
+            <p:ph type="sldNum" sz="quarter" idx="5"/>
+          </p:nvPr>
+        </p:nvSpPr>
+        <p:spPr/>
+        <p:txBody>
+          <a:bodyPr/>
+          <a:lstStyle/>
+          <a:p>
+            <a:fld id="{30752F2A-FA59-1746-ABA5-28C394E5ED08}" type="slidenum">
+              <a:rPr lang="en-US" smtClean="0"/>
+              <a:t>10</a:t>
+            </a:fld>
+            <a:endParaRPr lang="en-US"/>
+          </a:p>
+        </p:txBody>
+      </p:sp>
+    </p:spTree>
+    <p:extLst>
+      <p:ext uri="{BB962C8B-B14F-4D97-AF65-F5344CB8AC3E}">
+        <p14:creationId xmlns:p14="http://schemas.microsoft.com/office/powerpoint/2010/main" val="1998856708"/>
+      </p:ext>
+    </p:extLst>
+  </p:cSld>
+  <p:clrMapOvr>
+    <a:masterClrMapping/>
+  </p:clrMapOvr>
+</p:notes>
+</file>
+
+<file path=ppt/notesSlides/notesSlide11.xml><?xml version="1.0" encoding="utf-8"?>
+<p:notes xmlns:a="http://schemas.openxmlformats.org/drawingml/2006/main" xmlns:r="http://schemas.openxmlformats.org/officeDocument/2006/relationships" xmlns:p="http://schemas.openxmlformats.org/presentationml/2006/main">
+  <p:cSld>
+    <p:spTree>
+      <p:nvGrpSpPr>
+        <p:cNvPr id="1" name=""/>
+        <p:cNvGrpSpPr/>
+        <p:nvPr/>
+      </p:nvGrpSpPr>
+      <p:grpSpPr>
+        <a:xfrm>
+          <a:off x="0" y="0"/>
+          <a:ext cx="0" cy="0"/>
+          <a:chOff x="0" y="0"/>
+          <a:chExt cx="0" cy="0"/>
+        </a:xfrm>
+      </p:grpSpPr>
+      <p:sp>
+        <p:nvSpPr>
+          <p:cNvPr id="2" name="Slide Image Placeholder 1"/>
+          <p:cNvSpPr>
+            <a:spLocks noGrp="1" noRot="1" noChangeAspect="1"/>
+          </p:cNvSpPr>
+          <p:nvPr>
+            <p:ph type="sldImg"/>
+          </p:nvPr>
+        </p:nvSpPr>
+        <p:spPr/>
+      </p:sp>
+      <p:sp>
+        <p:nvSpPr>
+          <p:cNvPr id="3" name="Notes Placeholder 2"/>
+          <p:cNvSpPr>
+            <a:spLocks noGrp="1"/>
+          </p:cNvSpPr>
+          <p:nvPr>
+            <p:ph type="body" idx="1"/>
+          </p:nvPr>
+        </p:nvSpPr>
+        <p:spPr/>
+        <p:txBody>
+          <a:bodyPr/>
+          <a:lstStyle/>
+          <a:p>
+            <a:endParaRPr lang="en-US"/>
+          </a:p>
+        </p:txBody>
+      </p:sp>
+      <p:sp>
+        <p:nvSpPr>
+          <p:cNvPr id="4" name="Slide Number Placeholder 3"/>
+          <p:cNvSpPr>
+            <a:spLocks noGrp="1"/>
+          </p:cNvSpPr>
+          <p:nvPr>
+            <p:ph type="sldNum" sz="quarter" idx="5"/>
+          </p:nvPr>
+        </p:nvSpPr>
+        <p:spPr/>
+        <p:txBody>
+          <a:bodyPr/>
+          <a:lstStyle/>
+          <a:p>
+            <a:fld id="{30752F2A-FA59-1746-ABA5-28C394E5ED08}" type="slidenum">
+              <a:rPr lang="en-US" smtClean="0"/>
+              <a:t>11</a:t>
+            </a:fld>
+            <a:endParaRPr lang="en-US"/>
+          </a:p>
+        </p:txBody>
+      </p:sp>
+    </p:spTree>
+    <p:extLst>
+      <p:ext uri="{BB962C8B-B14F-4D97-AF65-F5344CB8AC3E}">
+        <p14:creationId xmlns:p14="http://schemas.microsoft.com/office/powerpoint/2010/main" val="3063554565"/>
+      </p:ext>
+    </p:extLst>
+  </p:cSld>
+  <p:clrMapOvr>
+    <a:masterClrMapping/>
+  </p:clrMapOvr>
+</p:notes>
+</file>
+
+<file path=ppt/notesSlides/notesSlide12.xml><?xml version="1.0" encoding="utf-8"?>
+<p:notes xmlns:a="http://schemas.openxmlformats.org/drawingml/2006/main" xmlns:r="http://schemas.openxmlformats.org/officeDocument/2006/relationships" xmlns:p="http://schemas.openxmlformats.org/presentationml/2006/main">
+  <p:cSld>
+    <p:spTree>
+      <p:nvGrpSpPr>
+        <p:cNvPr id="1" name=""/>
+        <p:cNvGrpSpPr/>
+        <p:nvPr/>
+      </p:nvGrpSpPr>
+      <p:grpSpPr>
+        <a:xfrm>
+          <a:off x="0" y="0"/>
+          <a:ext cx="0" cy="0"/>
+          <a:chOff x="0" y="0"/>
+          <a:chExt cx="0" cy="0"/>
+        </a:xfrm>
+      </p:grpSpPr>
+      <p:sp>
+        <p:nvSpPr>
+          <p:cNvPr id="2" name="Slide Image Placeholder 1"/>
+          <p:cNvSpPr>
+            <a:spLocks noGrp="1" noRot="1" noChangeAspect="1"/>
+          </p:cNvSpPr>
+          <p:nvPr>
+            <p:ph type="sldImg"/>
+          </p:nvPr>
+        </p:nvSpPr>
+        <p:spPr/>
+      </p:sp>
+      <p:sp>
+        <p:nvSpPr>
+          <p:cNvPr id="3" name="Notes Placeholder 2"/>
+          <p:cNvSpPr>
+            <a:spLocks noGrp="1"/>
+          </p:cNvSpPr>
+          <p:nvPr>
+            <p:ph type="body" idx="1"/>
+          </p:nvPr>
+        </p:nvSpPr>
+        <p:spPr/>
+        <p:txBody>
+          <a:bodyPr/>
+          <a:lstStyle/>
+          <a:p>
             <a:endParaRPr lang="en-US" dirty="0"/>
           </a:p>
         </p:txBody>
@@ -576,7 +828,679 @@
 </p:notes>
 </file>
 
+<file path=ppt/notesSlides/notesSlide13.xml><?xml version="1.0" encoding="utf-8"?>
+<p:notes xmlns:a="http://schemas.openxmlformats.org/drawingml/2006/main" xmlns:r="http://schemas.openxmlformats.org/officeDocument/2006/relationships" xmlns:p="http://schemas.openxmlformats.org/presentationml/2006/main">
+  <p:cSld>
+    <p:spTree>
+      <p:nvGrpSpPr>
+        <p:cNvPr id="1" name=""/>
+        <p:cNvGrpSpPr/>
+        <p:nvPr/>
+      </p:nvGrpSpPr>
+      <p:grpSpPr>
+        <a:xfrm>
+          <a:off x="0" y="0"/>
+          <a:ext cx="0" cy="0"/>
+          <a:chOff x="0" y="0"/>
+          <a:chExt cx="0" cy="0"/>
+        </a:xfrm>
+      </p:grpSpPr>
+      <p:sp>
+        <p:nvSpPr>
+          <p:cNvPr id="2" name="Slide Image Placeholder 1"/>
+          <p:cNvSpPr>
+            <a:spLocks noGrp="1" noRot="1" noChangeAspect="1"/>
+          </p:cNvSpPr>
+          <p:nvPr>
+            <p:ph type="sldImg"/>
+          </p:nvPr>
+        </p:nvSpPr>
+        <p:spPr/>
+      </p:sp>
+      <p:sp>
+        <p:nvSpPr>
+          <p:cNvPr id="3" name="Notes Placeholder 2"/>
+          <p:cNvSpPr>
+            <a:spLocks noGrp="1"/>
+          </p:cNvSpPr>
+          <p:nvPr>
+            <p:ph type="body" idx="1"/>
+          </p:nvPr>
+        </p:nvSpPr>
+        <p:spPr/>
+        <p:txBody>
+          <a:bodyPr/>
+          <a:lstStyle/>
+          <a:p>
+            <a:endParaRPr lang="en-US"/>
+          </a:p>
+        </p:txBody>
+      </p:sp>
+      <p:sp>
+        <p:nvSpPr>
+          <p:cNvPr id="4" name="Slide Number Placeholder 3"/>
+          <p:cNvSpPr>
+            <a:spLocks noGrp="1"/>
+          </p:cNvSpPr>
+          <p:nvPr>
+            <p:ph type="sldNum" sz="quarter" idx="5"/>
+          </p:nvPr>
+        </p:nvSpPr>
+        <p:spPr/>
+        <p:txBody>
+          <a:bodyPr/>
+          <a:lstStyle/>
+          <a:p>
+            <a:fld id="{30752F2A-FA59-1746-ABA5-28C394E5ED08}" type="slidenum">
+              <a:rPr lang="en-US" smtClean="0"/>
+              <a:t>13</a:t>
+            </a:fld>
+            <a:endParaRPr lang="en-US"/>
+          </a:p>
+        </p:txBody>
+      </p:sp>
+    </p:spTree>
+    <p:extLst>
+      <p:ext uri="{BB962C8B-B14F-4D97-AF65-F5344CB8AC3E}">
+        <p14:creationId xmlns:p14="http://schemas.microsoft.com/office/powerpoint/2010/main" val="4020895023"/>
+      </p:ext>
+    </p:extLst>
+  </p:cSld>
+  <p:clrMapOvr>
+    <a:masterClrMapping/>
+  </p:clrMapOvr>
+</p:notes>
+</file>
+
+<file path=ppt/notesSlides/notesSlide14.xml><?xml version="1.0" encoding="utf-8"?>
+<p:notes xmlns:a="http://schemas.openxmlformats.org/drawingml/2006/main" xmlns:r="http://schemas.openxmlformats.org/officeDocument/2006/relationships" xmlns:p="http://schemas.openxmlformats.org/presentationml/2006/main">
+  <p:cSld>
+    <p:spTree>
+      <p:nvGrpSpPr>
+        <p:cNvPr id="1" name=""/>
+        <p:cNvGrpSpPr/>
+        <p:nvPr/>
+      </p:nvGrpSpPr>
+      <p:grpSpPr>
+        <a:xfrm>
+          <a:off x="0" y="0"/>
+          <a:ext cx="0" cy="0"/>
+          <a:chOff x="0" y="0"/>
+          <a:chExt cx="0" cy="0"/>
+        </a:xfrm>
+      </p:grpSpPr>
+      <p:sp>
+        <p:nvSpPr>
+          <p:cNvPr id="2" name="Slide Image Placeholder 1"/>
+          <p:cNvSpPr>
+            <a:spLocks noGrp="1" noRot="1" noChangeAspect="1"/>
+          </p:cNvSpPr>
+          <p:nvPr>
+            <p:ph type="sldImg"/>
+          </p:nvPr>
+        </p:nvSpPr>
+        <p:spPr/>
+      </p:sp>
+      <p:sp>
+        <p:nvSpPr>
+          <p:cNvPr id="3" name="Notes Placeholder 2"/>
+          <p:cNvSpPr>
+            <a:spLocks noGrp="1"/>
+          </p:cNvSpPr>
+          <p:nvPr>
+            <p:ph type="body" idx="1"/>
+          </p:nvPr>
+        </p:nvSpPr>
+        <p:spPr/>
+        <p:txBody>
+          <a:bodyPr/>
+          <a:lstStyle/>
+          <a:p>
+            <a:endParaRPr lang="en-US"/>
+          </a:p>
+        </p:txBody>
+      </p:sp>
+      <p:sp>
+        <p:nvSpPr>
+          <p:cNvPr id="4" name="Slide Number Placeholder 3"/>
+          <p:cNvSpPr>
+            <a:spLocks noGrp="1"/>
+          </p:cNvSpPr>
+          <p:nvPr>
+            <p:ph type="sldNum" sz="quarter" idx="5"/>
+          </p:nvPr>
+        </p:nvSpPr>
+        <p:spPr/>
+        <p:txBody>
+          <a:bodyPr/>
+          <a:lstStyle/>
+          <a:p>
+            <a:fld id="{30752F2A-FA59-1746-ABA5-28C394E5ED08}" type="slidenum">
+              <a:rPr lang="en-US" smtClean="0"/>
+              <a:t>14</a:t>
+            </a:fld>
+            <a:endParaRPr lang="en-US"/>
+          </a:p>
+        </p:txBody>
+      </p:sp>
+    </p:spTree>
+    <p:extLst>
+      <p:ext uri="{BB962C8B-B14F-4D97-AF65-F5344CB8AC3E}">
+        <p14:creationId xmlns:p14="http://schemas.microsoft.com/office/powerpoint/2010/main" val="3272214274"/>
+      </p:ext>
+    </p:extLst>
+  </p:cSld>
+  <p:clrMapOvr>
+    <a:masterClrMapping/>
+  </p:clrMapOvr>
+</p:notes>
+</file>
+
+<file path=ppt/notesSlides/notesSlide15.xml><?xml version="1.0" encoding="utf-8"?>
+<p:notes xmlns:a="http://schemas.openxmlformats.org/drawingml/2006/main" xmlns:r="http://schemas.openxmlformats.org/officeDocument/2006/relationships" xmlns:p="http://schemas.openxmlformats.org/presentationml/2006/main">
+  <p:cSld>
+    <p:spTree>
+      <p:nvGrpSpPr>
+        <p:cNvPr id="1" name=""/>
+        <p:cNvGrpSpPr/>
+        <p:nvPr/>
+      </p:nvGrpSpPr>
+      <p:grpSpPr>
+        <a:xfrm>
+          <a:off x="0" y="0"/>
+          <a:ext cx="0" cy="0"/>
+          <a:chOff x="0" y="0"/>
+          <a:chExt cx="0" cy="0"/>
+        </a:xfrm>
+      </p:grpSpPr>
+      <p:sp>
+        <p:nvSpPr>
+          <p:cNvPr id="2" name="Slide Image Placeholder 1"/>
+          <p:cNvSpPr>
+            <a:spLocks noGrp="1" noRot="1" noChangeAspect="1"/>
+          </p:cNvSpPr>
+          <p:nvPr>
+            <p:ph type="sldImg"/>
+          </p:nvPr>
+        </p:nvSpPr>
+        <p:spPr/>
+      </p:sp>
+      <p:sp>
+        <p:nvSpPr>
+          <p:cNvPr id="3" name="Notes Placeholder 2"/>
+          <p:cNvSpPr>
+            <a:spLocks noGrp="1"/>
+          </p:cNvSpPr>
+          <p:nvPr>
+            <p:ph type="body" idx="1"/>
+          </p:nvPr>
+        </p:nvSpPr>
+        <p:spPr/>
+        <p:txBody>
+          <a:bodyPr/>
+          <a:lstStyle/>
+          <a:p>
+            <a:endParaRPr lang="en-US"/>
+          </a:p>
+        </p:txBody>
+      </p:sp>
+      <p:sp>
+        <p:nvSpPr>
+          <p:cNvPr id="4" name="Slide Number Placeholder 3"/>
+          <p:cNvSpPr>
+            <a:spLocks noGrp="1"/>
+          </p:cNvSpPr>
+          <p:nvPr>
+            <p:ph type="sldNum" sz="quarter" idx="5"/>
+          </p:nvPr>
+        </p:nvSpPr>
+        <p:spPr/>
+        <p:txBody>
+          <a:bodyPr/>
+          <a:lstStyle/>
+          <a:p>
+            <a:fld id="{30752F2A-FA59-1746-ABA5-28C394E5ED08}" type="slidenum">
+              <a:rPr lang="en-US" smtClean="0"/>
+              <a:t>15</a:t>
+            </a:fld>
+            <a:endParaRPr lang="en-US"/>
+          </a:p>
+        </p:txBody>
+      </p:sp>
+    </p:spTree>
+    <p:extLst>
+      <p:ext uri="{BB962C8B-B14F-4D97-AF65-F5344CB8AC3E}">
+        <p14:creationId xmlns:p14="http://schemas.microsoft.com/office/powerpoint/2010/main" val="2716460701"/>
+      </p:ext>
+    </p:extLst>
+  </p:cSld>
+  <p:clrMapOvr>
+    <a:masterClrMapping/>
+  </p:clrMapOvr>
+</p:notes>
+</file>
+
+<file path=ppt/notesSlides/notesSlide16.xml><?xml version="1.0" encoding="utf-8"?>
+<p:notes xmlns:a="http://schemas.openxmlformats.org/drawingml/2006/main" xmlns:r="http://schemas.openxmlformats.org/officeDocument/2006/relationships" xmlns:p="http://schemas.openxmlformats.org/presentationml/2006/main">
+  <p:cSld>
+    <p:spTree>
+      <p:nvGrpSpPr>
+        <p:cNvPr id="1" name=""/>
+        <p:cNvGrpSpPr/>
+        <p:nvPr/>
+      </p:nvGrpSpPr>
+      <p:grpSpPr>
+        <a:xfrm>
+          <a:off x="0" y="0"/>
+          <a:ext cx="0" cy="0"/>
+          <a:chOff x="0" y="0"/>
+          <a:chExt cx="0" cy="0"/>
+        </a:xfrm>
+      </p:grpSpPr>
+      <p:sp>
+        <p:nvSpPr>
+          <p:cNvPr id="2" name="Slide Image Placeholder 1"/>
+          <p:cNvSpPr>
+            <a:spLocks noGrp="1" noRot="1" noChangeAspect="1"/>
+          </p:cNvSpPr>
+          <p:nvPr>
+            <p:ph type="sldImg"/>
+          </p:nvPr>
+        </p:nvSpPr>
+        <p:spPr/>
+      </p:sp>
+      <p:sp>
+        <p:nvSpPr>
+          <p:cNvPr id="3" name="Notes Placeholder 2"/>
+          <p:cNvSpPr>
+            <a:spLocks noGrp="1"/>
+          </p:cNvSpPr>
+          <p:nvPr>
+            <p:ph type="body" idx="1"/>
+          </p:nvPr>
+        </p:nvSpPr>
+        <p:spPr/>
+        <p:txBody>
+          <a:bodyPr/>
+          <a:lstStyle/>
+          <a:p>
+            <a:endParaRPr lang="en-US"/>
+          </a:p>
+        </p:txBody>
+      </p:sp>
+      <p:sp>
+        <p:nvSpPr>
+          <p:cNvPr id="4" name="Slide Number Placeholder 3"/>
+          <p:cNvSpPr>
+            <a:spLocks noGrp="1"/>
+          </p:cNvSpPr>
+          <p:nvPr>
+            <p:ph type="sldNum" sz="quarter" idx="5"/>
+          </p:nvPr>
+        </p:nvSpPr>
+        <p:spPr/>
+        <p:txBody>
+          <a:bodyPr/>
+          <a:lstStyle/>
+          <a:p>
+            <a:fld id="{30752F2A-FA59-1746-ABA5-28C394E5ED08}" type="slidenum">
+              <a:rPr lang="en-US" smtClean="0"/>
+              <a:t>16</a:t>
+            </a:fld>
+            <a:endParaRPr lang="en-US"/>
+          </a:p>
+        </p:txBody>
+      </p:sp>
+    </p:spTree>
+    <p:extLst>
+      <p:ext uri="{BB962C8B-B14F-4D97-AF65-F5344CB8AC3E}">
+        <p14:creationId xmlns:p14="http://schemas.microsoft.com/office/powerpoint/2010/main" val="303963408"/>
+      </p:ext>
+    </p:extLst>
+  </p:cSld>
+  <p:clrMapOvr>
+    <a:masterClrMapping/>
+  </p:clrMapOvr>
+</p:notes>
+</file>
+
+<file path=ppt/notesSlides/notesSlide17.xml><?xml version="1.0" encoding="utf-8"?>
+<p:notes xmlns:a="http://schemas.openxmlformats.org/drawingml/2006/main" xmlns:r="http://schemas.openxmlformats.org/officeDocument/2006/relationships" xmlns:p="http://schemas.openxmlformats.org/presentationml/2006/main">
+  <p:cSld>
+    <p:spTree>
+      <p:nvGrpSpPr>
+        <p:cNvPr id="1" name=""/>
+        <p:cNvGrpSpPr/>
+        <p:nvPr/>
+      </p:nvGrpSpPr>
+      <p:grpSpPr>
+        <a:xfrm>
+          <a:off x="0" y="0"/>
+          <a:ext cx="0" cy="0"/>
+          <a:chOff x="0" y="0"/>
+          <a:chExt cx="0" cy="0"/>
+        </a:xfrm>
+      </p:grpSpPr>
+      <p:sp>
+        <p:nvSpPr>
+          <p:cNvPr id="2" name="Slide Image Placeholder 1"/>
+          <p:cNvSpPr>
+            <a:spLocks noGrp="1" noRot="1" noChangeAspect="1"/>
+          </p:cNvSpPr>
+          <p:nvPr>
+            <p:ph type="sldImg"/>
+          </p:nvPr>
+        </p:nvSpPr>
+        <p:spPr/>
+      </p:sp>
+      <p:sp>
+        <p:nvSpPr>
+          <p:cNvPr id="3" name="Notes Placeholder 2"/>
+          <p:cNvSpPr>
+            <a:spLocks noGrp="1"/>
+          </p:cNvSpPr>
+          <p:nvPr>
+            <p:ph type="body" idx="1"/>
+          </p:nvPr>
+        </p:nvSpPr>
+        <p:spPr/>
+        <p:txBody>
+          <a:bodyPr/>
+          <a:lstStyle/>
+          <a:p>
+            <a:endParaRPr lang="en-US"/>
+          </a:p>
+        </p:txBody>
+      </p:sp>
+      <p:sp>
+        <p:nvSpPr>
+          <p:cNvPr id="4" name="Slide Number Placeholder 3"/>
+          <p:cNvSpPr>
+            <a:spLocks noGrp="1"/>
+          </p:cNvSpPr>
+          <p:nvPr>
+            <p:ph type="sldNum" sz="quarter" idx="5"/>
+          </p:nvPr>
+        </p:nvSpPr>
+        <p:spPr/>
+        <p:txBody>
+          <a:bodyPr/>
+          <a:lstStyle/>
+          <a:p>
+            <a:fld id="{30752F2A-FA59-1746-ABA5-28C394E5ED08}" type="slidenum">
+              <a:rPr lang="en-US" smtClean="0"/>
+              <a:t>17</a:t>
+            </a:fld>
+            <a:endParaRPr lang="en-US"/>
+          </a:p>
+        </p:txBody>
+      </p:sp>
+    </p:spTree>
+    <p:extLst>
+      <p:ext uri="{BB962C8B-B14F-4D97-AF65-F5344CB8AC3E}">
+        <p14:creationId xmlns:p14="http://schemas.microsoft.com/office/powerpoint/2010/main" val="3000946799"/>
+      </p:ext>
+    </p:extLst>
+  </p:cSld>
+  <p:clrMapOvr>
+    <a:masterClrMapping/>
+  </p:clrMapOvr>
+</p:notes>
+</file>
+
+<file path=ppt/notesSlides/notesSlide18.xml><?xml version="1.0" encoding="utf-8"?>
+<p:notes xmlns:a="http://schemas.openxmlformats.org/drawingml/2006/main" xmlns:r="http://schemas.openxmlformats.org/officeDocument/2006/relationships" xmlns:p="http://schemas.openxmlformats.org/presentationml/2006/main">
+  <p:cSld>
+    <p:spTree>
+      <p:nvGrpSpPr>
+        <p:cNvPr id="1" name=""/>
+        <p:cNvGrpSpPr/>
+        <p:nvPr/>
+      </p:nvGrpSpPr>
+      <p:grpSpPr>
+        <a:xfrm>
+          <a:off x="0" y="0"/>
+          <a:ext cx="0" cy="0"/>
+          <a:chOff x="0" y="0"/>
+          <a:chExt cx="0" cy="0"/>
+        </a:xfrm>
+      </p:grpSpPr>
+      <p:sp>
+        <p:nvSpPr>
+          <p:cNvPr id="2" name="Slide Image Placeholder 1"/>
+          <p:cNvSpPr>
+            <a:spLocks noGrp="1" noRot="1" noChangeAspect="1"/>
+          </p:cNvSpPr>
+          <p:nvPr>
+            <p:ph type="sldImg"/>
+          </p:nvPr>
+        </p:nvSpPr>
+        <p:spPr/>
+      </p:sp>
+      <p:sp>
+        <p:nvSpPr>
+          <p:cNvPr id="3" name="Notes Placeholder 2"/>
+          <p:cNvSpPr>
+            <a:spLocks noGrp="1"/>
+          </p:cNvSpPr>
+          <p:nvPr>
+            <p:ph type="body" idx="1"/>
+          </p:nvPr>
+        </p:nvSpPr>
+        <p:spPr/>
+        <p:txBody>
+          <a:bodyPr/>
+          <a:lstStyle/>
+          <a:p>
+            <a:endParaRPr lang="en-US"/>
+          </a:p>
+        </p:txBody>
+      </p:sp>
+      <p:sp>
+        <p:nvSpPr>
+          <p:cNvPr id="4" name="Slide Number Placeholder 3"/>
+          <p:cNvSpPr>
+            <a:spLocks noGrp="1"/>
+          </p:cNvSpPr>
+          <p:nvPr>
+            <p:ph type="sldNum" sz="quarter" idx="5"/>
+          </p:nvPr>
+        </p:nvSpPr>
+        <p:spPr/>
+        <p:txBody>
+          <a:bodyPr/>
+          <a:lstStyle/>
+          <a:p>
+            <a:fld id="{30752F2A-FA59-1746-ABA5-28C394E5ED08}" type="slidenum">
+              <a:rPr lang="en-US" smtClean="0"/>
+              <a:t>18</a:t>
+            </a:fld>
+            <a:endParaRPr lang="en-US"/>
+          </a:p>
+        </p:txBody>
+      </p:sp>
+    </p:spTree>
+    <p:extLst>
+      <p:ext uri="{BB962C8B-B14F-4D97-AF65-F5344CB8AC3E}">
+        <p14:creationId xmlns:p14="http://schemas.microsoft.com/office/powerpoint/2010/main" val="3123942649"/>
+      </p:ext>
+    </p:extLst>
+  </p:cSld>
+  <p:clrMapOvr>
+    <a:masterClrMapping/>
+  </p:clrMapOvr>
+</p:notes>
+</file>
+
+<file path=ppt/notesSlides/notesSlide19.xml><?xml version="1.0" encoding="utf-8"?>
+<p:notes xmlns:a="http://schemas.openxmlformats.org/drawingml/2006/main" xmlns:r="http://schemas.openxmlformats.org/officeDocument/2006/relationships" xmlns:p="http://schemas.openxmlformats.org/presentationml/2006/main">
+  <p:cSld>
+    <p:spTree>
+      <p:nvGrpSpPr>
+        <p:cNvPr id="1" name=""/>
+        <p:cNvGrpSpPr/>
+        <p:nvPr/>
+      </p:nvGrpSpPr>
+      <p:grpSpPr>
+        <a:xfrm>
+          <a:off x="0" y="0"/>
+          <a:ext cx="0" cy="0"/>
+          <a:chOff x="0" y="0"/>
+          <a:chExt cx="0" cy="0"/>
+        </a:xfrm>
+      </p:grpSpPr>
+      <p:sp>
+        <p:nvSpPr>
+          <p:cNvPr id="2" name="Slide Image Placeholder 1"/>
+          <p:cNvSpPr>
+            <a:spLocks noGrp="1" noRot="1" noChangeAspect="1"/>
+          </p:cNvSpPr>
+          <p:nvPr>
+            <p:ph type="sldImg"/>
+          </p:nvPr>
+        </p:nvSpPr>
+        <p:spPr/>
+      </p:sp>
+      <p:sp>
+        <p:nvSpPr>
+          <p:cNvPr id="3" name="Notes Placeholder 2"/>
+          <p:cNvSpPr>
+            <a:spLocks noGrp="1"/>
+          </p:cNvSpPr>
+          <p:nvPr>
+            <p:ph type="body" idx="1"/>
+          </p:nvPr>
+        </p:nvSpPr>
+        <p:spPr/>
+        <p:txBody>
+          <a:bodyPr/>
+          <a:lstStyle/>
+          <a:p>
+            <a:endParaRPr lang="en-US"/>
+          </a:p>
+        </p:txBody>
+      </p:sp>
+      <p:sp>
+        <p:nvSpPr>
+          <p:cNvPr id="4" name="Slide Number Placeholder 3"/>
+          <p:cNvSpPr>
+            <a:spLocks noGrp="1"/>
+          </p:cNvSpPr>
+          <p:nvPr>
+            <p:ph type="sldNum" sz="quarter" idx="5"/>
+          </p:nvPr>
+        </p:nvSpPr>
+        <p:spPr/>
+        <p:txBody>
+          <a:bodyPr/>
+          <a:lstStyle/>
+          <a:p>
+            <a:fld id="{30752F2A-FA59-1746-ABA5-28C394E5ED08}" type="slidenum">
+              <a:rPr lang="en-US" smtClean="0"/>
+              <a:t>19</a:t>
+            </a:fld>
+            <a:endParaRPr lang="en-US"/>
+          </a:p>
+        </p:txBody>
+      </p:sp>
+    </p:spTree>
+    <p:extLst>
+      <p:ext uri="{BB962C8B-B14F-4D97-AF65-F5344CB8AC3E}">
+        <p14:creationId xmlns:p14="http://schemas.microsoft.com/office/powerpoint/2010/main" val="3804614233"/>
+      </p:ext>
+    </p:extLst>
+  </p:cSld>
+  <p:clrMapOvr>
+    <a:masterClrMapping/>
+  </p:clrMapOvr>
+</p:notes>
+</file>
+
 <file path=ppt/notesSlides/notesSlide2.xml><?xml version="1.0" encoding="utf-8"?>
+<p:notes xmlns:a="http://schemas.openxmlformats.org/drawingml/2006/main" xmlns:r="http://schemas.openxmlformats.org/officeDocument/2006/relationships" xmlns:p="http://schemas.openxmlformats.org/presentationml/2006/main">
+  <p:cSld>
+    <p:spTree>
+      <p:nvGrpSpPr>
+        <p:cNvPr id="1" name=""/>
+        <p:cNvGrpSpPr/>
+        <p:nvPr/>
+      </p:nvGrpSpPr>
+      <p:grpSpPr>
+        <a:xfrm>
+          <a:off x="0" y="0"/>
+          <a:ext cx="0" cy="0"/>
+          <a:chOff x="0" y="0"/>
+          <a:chExt cx="0" cy="0"/>
+        </a:xfrm>
+      </p:grpSpPr>
+      <p:sp>
+        <p:nvSpPr>
+          <p:cNvPr id="2" name="Slide Image Placeholder 1"/>
+          <p:cNvSpPr>
+            <a:spLocks noGrp="1" noRot="1" noChangeAspect="1"/>
+          </p:cNvSpPr>
+          <p:nvPr>
+            <p:ph type="sldImg"/>
+          </p:nvPr>
+        </p:nvSpPr>
+        <p:spPr/>
+      </p:sp>
+      <p:sp>
+        <p:nvSpPr>
+          <p:cNvPr id="3" name="Notes Placeholder 2"/>
+          <p:cNvSpPr>
+            <a:spLocks noGrp="1"/>
+          </p:cNvSpPr>
+          <p:nvPr>
+            <p:ph type="body" idx="1"/>
+          </p:nvPr>
+        </p:nvSpPr>
+        <p:spPr/>
+        <p:txBody>
+          <a:bodyPr/>
+          <a:lstStyle/>
+          <a:p>
+            <a:endParaRPr lang="en-US"/>
+          </a:p>
+        </p:txBody>
+      </p:sp>
+      <p:sp>
+        <p:nvSpPr>
+          <p:cNvPr id="4" name="Slide Number Placeholder 3"/>
+          <p:cNvSpPr>
+            <a:spLocks noGrp="1"/>
+          </p:cNvSpPr>
+          <p:nvPr>
+            <p:ph type="sldNum" sz="quarter" idx="5"/>
+          </p:nvPr>
+        </p:nvSpPr>
+        <p:spPr/>
+        <p:txBody>
+          <a:bodyPr/>
+          <a:lstStyle/>
+          <a:p>
+            <a:fld id="{30752F2A-FA59-1746-ABA5-28C394E5ED08}" type="slidenum">
+              <a:rPr lang="en-US" smtClean="0"/>
+              <a:t>2</a:t>
+            </a:fld>
+            <a:endParaRPr lang="en-US"/>
+          </a:p>
+        </p:txBody>
+      </p:sp>
+    </p:spTree>
+    <p:extLst>
+      <p:ext uri="{BB962C8B-B14F-4D97-AF65-F5344CB8AC3E}">
+        <p14:creationId xmlns:p14="http://schemas.microsoft.com/office/powerpoint/2010/main" val="1845758670"/>
+      </p:ext>
+    </p:extLst>
+  </p:cSld>
+  <p:clrMapOvr>
+    <a:masterClrMapping/>
+  </p:clrMapOvr>
+</p:notes>
+</file>
+
+<file path=ppt/notesSlides/notesSlide20.xml><?xml version="1.0" encoding="utf-8"?>
 <p:notes xmlns:a="http://schemas.openxmlformats.org/drawingml/2006/main" xmlns:r="http://schemas.openxmlformats.org/officeDocument/2006/relationships" xmlns:p="http://schemas.openxmlformats.org/presentationml/2006/main">
   <p:cSld>
     <p:spTree>
@@ -737,6 +1661,700 @@
 </p:notes>
 </file>
 
+<file path=ppt/notesSlides/notesSlide21.xml><?xml version="1.0" encoding="utf-8"?>
+<p:notes xmlns:a="http://schemas.openxmlformats.org/drawingml/2006/main" xmlns:r="http://schemas.openxmlformats.org/officeDocument/2006/relationships" xmlns:p="http://schemas.openxmlformats.org/presentationml/2006/main">
+  <p:cSld>
+    <p:spTree>
+      <p:nvGrpSpPr>
+        <p:cNvPr id="1" name=""/>
+        <p:cNvGrpSpPr/>
+        <p:nvPr/>
+      </p:nvGrpSpPr>
+      <p:grpSpPr>
+        <a:xfrm>
+          <a:off x="0" y="0"/>
+          <a:ext cx="0" cy="0"/>
+          <a:chOff x="0" y="0"/>
+          <a:chExt cx="0" cy="0"/>
+        </a:xfrm>
+      </p:grpSpPr>
+      <p:sp>
+        <p:nvSpPr>
+          <p:cNvPr id="2" name="Slide Image Placeholder 1"/>
+          <p:cNvSpPr>
+            <a:spLocks noGrp="1" noRot="1" noChangeAspect="1"/>
+          </p:cNvSpPr>
+          <p:nvPr>
+            <p:ph type="sldImg"/>
+          </p:nvPr>
+        </p:nvSpPr>
+        <p:spPr/>
+      </p:sp>
+      <p:sp>
+        <p:nvSpPr>
+          <p:cNvPr id="3" name="Notes Placeholder 2"/>
+          <p:cNvSpPr>
+            <a:spLocks noGrp="1"/>
+          </p:cNvSpPr>
+          <p:nvPr>
+            <p:ph type="body" idx="1"/>
+          </p:nvPr>
+        </p:nvSpPr>
+        <p:spPr/>
+        <p:txBody>
+          <a:bodyPr/>
+          <a:lstStyle/>
+          <a:p>
+            <a:r>
+              <a:rPr lang="en-US"/>
+              <a:t>Do not modify the notes in this section to avoid tampering with the Poll Everywhere activity.
+More info at polleverywhere.com/support
+How many weights in a neural net with 4 inputs, 1 output and 3 hidden neurons across each of 2 hidden layers?</a:t>
+            </a:r>
+          </a:p>
+          <a:p>
+            <a:r>
+              <a:rPr lang="en-US"/>
+              <a:t>https://www.polleverywhere.com/multiple_choice_polls/jiILwRZI4f4Fp2NGhvLKg?state=opened&amp;flow=Default&amp;onscreen=persist</a:t>
+            </a:r>
+          </a:p>
+        </p:txBody>
+      </p:sp>
+      <p:sp>
+        <p:nvSpPr>
+          <p:cNvPr id="4" name="Slide Number Placeholder 3"/>
+          <p:cNvSpPr>
+            <a:spLocks noGrp="1"/>
+          </p:cNvSpPr>
+          <p:nvPr>
+            <p:ph type="sldNum" sz="quarter" idx="5"/>
+          </p:nvPr>
+        </p:nvSpPr>
+        <p:spPr/>
+        <p:txBody>
+          <a:bodyPr/>
+          <a:lstStyle/>
+          <a:p>
+            <a:fld id="{30752F2A-FA59-1746-ABA5-28C394E5ED08}" type="slidenum">
+              <a:rPr lang="en-US" smtClean="0"/>
+              <a:t>21</a:t>
+            </a:fld>
+            <a:endParaRPr lang="en-US"/>
+          </a:p>
+        </p:txBody>
+      </p:sp>
+    </p:spTree>
+    <p:extLst>
+      <p:ext uri="{BB962C8B-B14F-4D97-AF65-F5344CB8AC3E}">
+        <p14:creationId xmlns:p14="http://schemas.microsoft.com/office/powerpoint/2010/main" val="4039357474"/>
+      </p:ext>
+    </p:extLst>
+  </p:cSld>
+  <p:clrMapOvr>
+    <a:masterClrMapping/>
+  </p:clrMapOvr>
+</p:notes>
+</file>
+
+<file path=ppt/notesSlides/notesSlide22.xml><?xml version="1.0" encoding="utf-8"?>
+<p:notes xmlns:a="http://schemas.openxmlformats.org/drawingml/2006/main" xmlns:r="http://schemas.openxmlformats.org/officeDocument/2006/relationships" xmlns:p="http://schemas.openxmlformats.org/presentationml/2006/main">
+  <p:cSld>
+    <p:spTree>
+      <p:nvGrpSpPr>
+        <p:cNvPr id="1" name=""/>
+        <p:cNvGrpSpPr/>
+        <p:nvPr/>
+      </p:nvGrpSpPr>
+      <p:grpSpPr>
+        <a:xfrm>
+          <a:off x="0" y="0"/>
+          <a:ext cx="0" cy="0"/>
+          <a:chOff x="0" y="0"/>
+          <a:chExt cx="0" cy="0"/>
+        </a:xfrm>
+      </p:grpSpPr>
+      <p:sp>
+        <p:nvSpPr>
+          <p:cNvPr id="2" name="Slide Image Placeholder 1"/>
+          <p:cNvSpPr>
+            <a:spLocks noGrp="1" noRot="1" noChangeAspect="1"/>
+          </p:cNvSpPr>
+          <p:nvPr>
+            <p:ph type="sldImg"/>
+          </p:nvPr>
+        </p:nvSpPr>
+        <p:spPr/>
+      </p:sp>
+      <p:sp>
+        <p:nvSpPr>
+          <p:cNvPr id="3" name="Notes Placeholder 2"/>
+          <p:cNvSpPr>
+            <a:spLocks noGrp="1"/>
+          </p:cNvSpPr>
+          <p:nvPr>
+            <p:ph type="body" idx="1"/>
+          </p:nvPr>
+        </p:nvSpPr>
+        <p:spPr/>
+        <p:txBody>
+          <a:bodyPr/>
+          <a:lstStyle/>
+          <a:p>
+            <a:r>
+              <a:rPr lang="en-US"/>
+              <a:t>Do not modify the notes in this section to avoid tampering with the Poll Everywhere activity.
+More info at polleverywhere.com/support
+If we build a neural network with 10 hidden layers but do not use any activation functions (like ReLU or Sigmoid) between them, what is the mathematical result of the entire network?</a:t>
+            </a:r>
+          </a:p>
+          <a:p>
+            <a:r>
+              <a:rPr lang="en-US"/>
+              <a:t>https://www.polleverywhere.com/multiple_choice_polls/0DiaqtZCrsQQdBoL8wxjR?state=opened&amp;flow=Default&amp;onscreen=persist</a:t>
+            </a:r>
+          </a:p>
+        </p:txBody>
+      </p:sp>
+      <p:sp>
+        <p:nvSpPr>
+          <p:cNvPr id="4" name="Slide Number Placeholder 3"/>
+          <p:cNvSpPr>
+            <a:spLocks noGrp="1"/>
+          </p:cNvSpPr>
+          <p:nvPr>
+            <p:ph type="sldNum" sz="quarter" idx="5"/>
+          </p:nvPr>
+        </p:nvSpPr>
+        <p:spPr/>
+        <p:txBody>
+          <a:bodyPr/>
+          <a:lstStyle/>
+          <a:p>
+            <a:fld id="{30752F2A-FA59-1746-ABA5-28C394E5ED08}" type="slidenum">
+              <a:rPr lang="en-US" smtClean="0"/>
+              <a:t>22</a:t>
+            </a:fld>
+            <a:endParaRPr lang="en-US"/>
+          </a:p>
+        </p:txBody>
+      </p:sp>
+    </p:spTree>
+    <p:extLst>
+      <p:ext uri="{BB962C8B-B14F-4D97-AF65-F5344CB8AC3E}">
+        <p14:creationId xmlns:p14="http://schemas.microsoft.com/office/powerpoint/2010/main" val="3462176253"/>
+      </p:ext>
+    </p:extLst>
+  </p:cSld>
+  <p:clrMapOvr>
+    <a:masterClrMapping/>
+  </p:clrMapOvr>
+</p:notes>
+</file>
+
+<file path=ppt/notesSlides/notesSlide23.xml><?xml version="1.0" encoding="utf-8"?>
+<p:notes xmlns:a="http://schemas.openxmlformats.org/drawingml/2006/main" xmlns:r="http://schemas.openxmlformats.org/officeDocument/2006/relationships" xmlns:p="http://schemas.openxmlformats.org/presentationml/2006/main">
+  <p:cSld>
+    <p:spTree>
+      <p:nvGrpSpPr>
+        <p:cNvPr id="1" name=""/>
+        <p:cNvGrpSpPr/>
+        <p:nvPr/>
+      </p:nvGrpSpPr>
+      <p:grpSpPr>
+        <a:xfrm>
+          <a:off x="0" y="0"/>
+          <a:ext cx="0" cy="0"/>
+          <a:chOff x="0" y="0"/>
+          <a:chExt cx="0" cy="0"/>
+        </a:xfrm>
+      </p:grpSpPr>
+      <p:sp>
+        <p:nvSpPr>
+          <p:cNvPr id="2" name="Slide Image Placeholder 1"/>
+          <p:cNvSpPr>
+            <a:spLocks noGrp="1" noRot="1" noChangeAspect="1"/>
+          </p:cNvSpPr>
+          <p:nvPr>
+            <p:ph type="sldImg"/>
+          </p:nvPr>
+        </p:nvSpPr>
+        <p:spPr/>
+      </p:sp>
+      <p:sp>
+        <p:nvSpPr>
+          <p:cNvPr id="3" name="Notes Placeholder 2"/>
+          <p:cNvSpPr>
+            <a:spLocks noGrp="1"/>
+          </p:cNvSpPr>
+          <p:nvPr>
+            <p:ph type="body" idx="1"/>
+          </p:nvPr>
+        </p:nvSpPr>
+        <p:spPr/>
+        <p:txBody>
+          <a:bodyPr/>
+          <a:lstStyle/>
+          <a:p>
+            <a:endParaRPr lang="en-US"/>
+          </a:p>
+        </p:txBody>
+      </p:sp>
+      <p:sp>
+        <p:nvSpPr>
+          <p:cNvPr id="4" name="Slide Number Placeholder 3"/>
+          <p:cNvSpPr>
+            <a:spLocks noGrp="1"/>
+          </p:cNvSpPr>
+          <p:nvPr>
+            <p:ph type="sldNum" sz="quarter" idx="5"/>
+          </p:nvPr>
+        </p:nvSpPr>
+        <p:spPr/>
+        <p:txBody>
+          <a:bodyPr/>
+          <a:lstStyle/>
+          <a:p>
+            <a:fld id="{30752F2A-FA59-1746-ABA5-28C394E5ED08}" type="slidenum">
+              <a:rPr lang="en-US" smtClean="0"/>
+              <a:t>23</a:t>
+            </a:fld>
+            <a:endParaRPr lang="en-US"/>
+          </a:p>
+        </p:txBody>
+      </p:sp>
+    </p:spTree>
+    <p:extLst>
+      <p:ext uri="{BB962C8B-B14F-4D97-AF65-F5344CB8AC3E}">
+        <p14:creationId xmlns:p14="http://schemas.microsoft.com/office/powerpoint/2010/main" val="2085162117"/>
+      </p:ext>
+    </p:extLst>
+  </p:cSld>
+  <p:clrMapOvr>
+    <a:masterClrMapping/>
+  </p:clrMapOvr>
+</p:notes>
+</file>
+
+<file path=ppt/notesSlides/notesSlide24.xml><?xml version="1.0" encoding="utf-8"?>
+<p:notes xmlns:a="http://schemas.openxmlformats.org/drawingml/2006/main" xmlns:r="http://schemas.openxmlformats.org/officeDocument/2006/relationships" xmlns:p="http://schemas.openxmlformats.org/presentationml/2006/main">
+  <p:cSld>
+    <p:spTree>
+      <p:nvGrpSpPr>
+        <p:cNvPr id="1" name=""/>
+        <p:cNvGrpSpPr/>
+        <p:nvPr/>
+      </p:nvGrpSpPr>
+      <p:grpSpPr>
+        <a:xfrm>
+          <a:off x="0" y="0"/>
+          <a:ext cx="0" cy="0"/>
+          <a:chOff x="0" y="0"/>
+          <a:chExt cx="0" cy="0"/>
+        </a:xfrm>
+      </p:grpSpPr>
+      <p:sp>
+        <p:nvSpPr>
+          <p:cNvPr id="2" name="Slide Image Placeholder 1"/>
+          <p:cNvSpPr>
+            <a:spLocks noGrp="1" noRot="1" noChangeAspect="1"/>
+          </p:cNvSpPr>
+          <p:nvPr>
+            <p:ph type="sldImg"/>
+          </p:nvPr>
+        </p:nvSpPr>
+        <p:spPr/>
+      </p:sp>
+      <p:sp>
+        <p:nvSpPr>
+          <p:cNvPr id="3" name="Notes Placeholder 2"/>
+          <p:cNvSpPr>
+            <a:spLocks noGrp="1"/>
+          </p:cNvSpPr>
+          <p:nvPr>
+            <p:ph type="body" idx="1"/>
+          </p:nvPr>
+        </p:nvSpPr>
+        <p:spPr/>
+        <p:txBody>
+          <a:bodyPr/>
+          <a:lstStyle/>
+          <a:p>
+            <a:endParaRPr lang="en-US"/>
+          </a:p>
+        </p:txBody>
+      </p:sp>
+      <p:sp>
+        <p:nvSpPr>
+          <p:cNvPr id="4" name="Slide Number Placeholder 3"/>
+          <p:cNvSpPr>
+            <a:spLocks noGrp="1"/>
+          </p:cNvSpPr>
+          <p:nvPr>
+            <p:ph type="sldNum" sz="quarter" idx="5"/>
+          </p:nvPr>
+        </p:nvSpPr>
+        <p:spPr/>
+        <p:txBody>
+          <a:bodyPr/>
+          <a:lstStyle/>
+          <a:p>
+            <a:fld id="{30752F2A-FA59-1746-ABA5-28C394E5ED08}" type="slidenum">
+              <a:rPr lang="en-US" smtClean="0"/>
+              <a:t>24</a:t>
+            </a:fld>
+            <a:endParaRPr lang="en-US"/>
+          </a:p>
+        </p:txBody>
+      </p:sp>
+    </p:spTree>
+    <p:extLst>
+      <p:ext uri="{BB962C8B-B14F-4D97-AF65-F5344CB8AC3E}">
+        <p14:creationId xmlns:p14="http://schemas.microsoft.com/office/powerpoint/2010/main" val="3541005745"/>
+      </p:ext>
+    </p:extLst>
+  </p:cSld>
+  <p:clrMapOvr>
+    <a:masterClrMapping/>
+  </p:clrMapOvr>
+</p:notes>
+</file>
+
+<file path=ppt/notesSlides/notesSlide25.xml><?xml version="1.0" encoding="utf-8"?>
+<p:notes xmlns:a="http://schemas.openxmlformats.org/drawingml/2006/main" xmlns:r="http://schemas.openxmlformats.org/officeDocument/2006/relationships" xmlns:p="http://schemas.openxmlformats.org/presentationml/2006/main">
+  <p:cSld>
+    <p:spTree>
+      <p:nvGrpSpPr>
+        <p:cNvPr id="1" name=""/>
+        <p:cNvGrpSpPr/>
+        <p:nvPr/>
+      </p:nvGrpSpPr>
+      <p:grpSpPr>
+        <a:xfrm>
+          <a:off x="0" y="0"/>
+          <a:ext cx="0" cy="0"/>
+          <a:chOff x="0" y="0"/>
+          <a:chExt cx="0" cy="0"/>
+        </a:xfrm>
+      </p:grpSpPr>
+      <p:sp>
+        <p:nvSpPr>
+          <p:cNvPr id="2" name="Slide Image Placeholder 1"/>
+          <p:cNvSpPr>
+            <a:spLocks noGrp="1" noRot="1" noChangeAspect="1"/>
+          </p:cNvSpPr>
+          <p:nvPr>
+            <p:ph type="sldImg"/>
+          </p:nvPr>
+        </p:nvSpPr>
+        <p:spPr/>
+      </p:sp>
+      <p:sp>
+        <p:nvSpPr>
+          <p:cNvPr id="3" name="Notes Placeholder 2"/>
+          <p:cNvSpPr>
+            <a:spLocks noGrp="1"/>
+          </p:cNvSpPr>
+          <p:nvPr>
+            <p:ph type="body" idx="1"/>
+          </p:nvPr>
+        </p:nvSpPr>
+        <p:spPr/>
+        <p:txBody>
+          <a:bodyPr/>
+          <a:lstStyle/>
+          <a:p>
+            <a:endParaRPr lang="en-US"/>
+          </a:p>
+        </p:txBody>
+      </p:sp>
+      <p:sp>
+        <p:nvSpPr>
+          <p:cNvPr id="4" name="Slide Number Placeholder 3"/>
+          <p:cNvSpPr>
+            <a:spLocks noGrp="1"/>
+          </p:cNvSpPr>
+          <p:nvPr>
+            <p:ph type="sldNum" sz="quarter" idx="5"/>
+          </p:nvPr>
+        </p:nvSpPr>
+        <p:spPr/>
+        <p:txBody>
+          <a:bodyPr/>
+          <a:lstStyle/>
+          <a:p>
+            <a:fld id="{30752F2A-FA59-1746-ABA5-28C394E5ED08}" type="slidenum">
+              <a:rPr lang="en-US" smtClean="0"/>
+              <a:t>25</a:t>
+            </a:fld>
+            <a:endParaRPr lang="en-US"/>
+          </a:p>
+        </p:txBody>
+      </p:sp>
+    </p:spTree>
+    <p:extLst>
+      <p:ext uri="{BB962C8B-B14F-4D97-AF65-F5344CB8AC3E}">
+        <p14:creationId xmlns:p14="http://schemas.microsoft.com/office/powerpoint/2010/main" val="3790711506"/>
+      </p:ext>
+    </p:extLst>
+  </p:cSld>
+  <p:clrMapOvr>
+    <a:masterClrMapping/>
+  </p:clrMapOvr>
+</p:notes>
+</file>
+
+<file path=ppt/notesSlides/notesSlide26.xml><?xml version="1.0" encoding="utf-8"?>
+<p:notes xmlns:a="http://schemas.openxmlformats.org/drawingml/2006/main" xmlns:r="http://schemas.openxmlformats.org/officeDocument/2006/relationships" xmlns:p="http://schemas.openxmlformats.org/presentationml/2006/main">
+  <p:cSld>
+    <p:spTree>
+      <p:nvGrpSpPr>
+        <p:cNvPr id="1" name=""/>
+        <p:cNvGrpSpPr/>
+        <p:nvPr/>
+      </p:nvGrpSpPr>
+      <p:grpSpPr>
+        <a:xfrm>
+          <a:off x="0" y="0"/>
+          <a:ext cx="0" cy="0"/>
+          <a:chOff x="0" y="0"/>
+          <a:chExt cx="0" cy="0"/>
+        </a:xfrm>
+      </p:grpSpPr>
+      <p:sp>
+        <p:nvSpPr>
+          <p:cNvPr id="2" name="Slide Image Placeholder 1"/>
+          <p:cNvSpPr>
+            <a:spLocks noGrp="1" noRot="1" noChangeAspect="1"/>
+          </p:cNvSpPr>
+          <p:nvPr>
+            <p:ph type="sldImg"/>
+          </p:nvPr>
+        </p:nvSpPr>
+        <p:spPr/>
+      </p:sp>
+      <p:sp>
+        <p:nvSpPr>
+          <p:cNvPr id="3" name="Notes Placeholder 2"/>
+          <p:cNvSpPr>
+            <a:spLocks noGrp="1"/>
+          </p:cNvSpPr>
+          <p:nvPr>
+            <p:ph type="body" idx="1"/>
+          </p:nvPr>
+        </p:nvSpPr>
+        <p:spPr/>
+        <p:txBody>
+          <a:bodyPr/>
+          <a:lstStyle/>
+          <a:p>
+            <a:endParaRPr lang="en-US"/>
+          </a:p>
+        </p:txBody>
+      </p:sp>
+      <p:sp>
+        <p:nvSpPr>
+          <p:cNvPr id="4" name="Slide Number Placeholder 3"/>
+          <p:cNvSpPr>
+            <a:spLocks noGrp="1"/>
+          </p:cNvSpPr>
+          <p:nvPr>
+            <p:ph type="sldNum" sz="quarter" idx="5"/>
+          </p:nvPr>
+        </p:nvSpPr>
+        <p:spPr/>
+        <p:txBody>
+          <a:bodyPr/>
+          <a:lstStyle/>
+          <a:p>
+            <a:fld id="{30752F2A-FA59-1746-ABA5-28C394E5ED08}" type="slidenum">
+              <a:rPr lang="en-US" smtClean="0"/>
+              <a:t>26</a:t>
+            </a:fld>
+            <a:endParaRPr lang="en-US"/>
+          </a:p>
+        </p:txBody>
+      </p:sp>
+    </p:spTree>
+    <p:extLst>
+      <p:ext uri="{BB962C8B-B14F-4D97-AF65-F5344CB8AC3E}">
+        <p14:creationId xmlns:p14="http://schemas.microsoft.com/office/powerpoint/2010/main" val="136885514"/>
+      </p:ext>
+    </p:extLst>
+  </p:cSld>
+  <p:clrMapOvr>
+    <a:masterClrMapping/>
+  </p:clrMapOvr>
+</p:notes>
+</file>
+
+<file path=ppt/notesSlides/notesSlide27.xml><?xml version="1.0" encoding="utf-8"?>
+<p:notes xmlns:a="http://schemas.openxmlformats.org/drawingml/2006/main" xmlns:r="http://schemas.openxmlformats.org/officeDocument/2006/relationships" xmlns:p="http://schemas.openxmlformats.org/presentationml/2006/main">
+  <p:cSld>
+    <p:spTree>
+      <p:nvGrpSpPr>
+        <p:cNvPr id="1" name=""/>
+        <p:cNvGrpSpPr/>
+        <p:nvPr/>
+      </p:nvGrpSpPr>
+      <p:grpSpPr>
+        <a:xfrm>
+          <a:off x="0" y="0"/>
+          <a:ext cx="0" cy="0"/>
+          <a:chOff x="0" y="0"/>
+          <a:chExt cx="0" cy="0"/>
+        </a:xfrm>
+      </p:grpSpPr>
+      <p:sp>
+        <p:nvSpPr>
+          <p:cNvPr id="2" name="Slide Image Placeholder 1"/>
+          <p:cNvSpPr>
+            <a:spLocks noGrp="1" noRot="1" noChangeAspect="1"/>
+          </p:cNvSpPr>
+          <p:nvPr>
+            <p:ph type="sldImg"/>
+          </p:nvPr>
+        </p:nvSpPr>
+        <p:spPr/>
+      </p:sp>
+      <p:sp>
+        <p:nvSpPr>
+          <p:cNvPr id="3" name="Notes Placeholder 2"/>
+          <p:cNvSpPr>
+            <a:spLocks noGrp="1"/>
+          </p:cNvSpPr>
+          <p:nvPr>
+            <p:ph type="body" idx="1"/>
+          </p:nvPr>
+        </p:nvSpPr>
+        <p:spPr/>
+        <p:txBody>
+          <a:bodyPr/>
+          <a:lstStyle/>
+          <a:p>
+            <a:endParaRPr lang="en-US"/>
+          </a:p>
+        </p:txBody>
+      </p:sp>
+      <p:sp>
+        <p:nvSpPr>
+          <p:cNvPr id="4" name="Slide Number Placeholder 3"/>
+          <p:cNvSpPr>
+            <a:spLocks noGrp="1"/>
+          </p:cNvSpPr>
+          <p:nvPr>
+            <p:ph type="sldNum" sz="quarter" idx="5"/>
+          </p:nvPr>
+        </p:nvSpPr>
+        <p:spPr/>
+        <p:txBody>
+          <a:bodyPr/>
+          <a:lstStyle/>
+          <a:p>
+            <a:fld id="{30752F2A-FA59-1746-ABA5-28C394E5ED08}" type="slidenum">
+              <a:rPr lang="en-US" smtClean="0"/>
+              <a:t>27</a:t>
+            </a:fld>
+            <a:endParaRPr lang="en-US"/>
+          </a:p>
+        </p:txBody>
+      </p:sp>
+    </p:spTree>
+    <p:extLst>
+      <p:ext uri="{BB962C8B-B14F-4D97-AF65-F5344CB8AC3E}">
+        <p14:creationId xmlns:p14="http://schemas.microsoft.com/office/powerpoint/2010/main" val="468567458"/>
+      </p:ext>
+    </p:extLst>
+  </p:cSld>
+  <p:clrMapOvr>
+    <a:masterClrMapping/>
+  </p:clrMapOvr>
+</p:notes>
+</file>
+
+<file path=ppt/notesSlides/notesSlide28.xml><?xml version="1.0" encoding="utf-8"?>
+<p:notes xmlns:a="http://schemas.openxmlformats.org/drawingml/2006/main" xmlns:r="http://schemas.openxmlformats.org/officeDocument/2006/relationships" xmlns:p="http://schemas.openxmlformats.org/presentationml/2006/main">
+  <p:cSld>
+    <p:spTree>
+      <p:nvGrpSpPr>
+        <p:cNvPr id="1" name=""/>
+        <p:cNvGrpSpPr/>
+        <p:nvPr/>
+      </p:nvGrpSpPr>
+      <p:grpSpPr>
+        <a:xfrm>
+          <a:off x="0" y="0"/>
+          <a:ext cx="0" cy="0"/>
+          <a:chOff x="0" y="0"/>
+          <a:chExt cx="0" cy="0"/>
+        </a:xfrm>
+      </p:grpSpPr>
+      <p:sp>
+        <p:nvSpPr>
+          <p:cNvPr id="2" name="Slide Image Placeholder 1"/>
+          <p:cNvSpPr>
+            <a:spLocks noGrp="1" noRot="1" noChangeAspect="1"/>
+          </p:cNvSpPr>
+          <p:nvPr>
+            <p:ph type="sldImg"/>
+          </p:nvPr>
+        </p:nvSpPr>
+        <p:spPr/>
+      </p:sp>
+      <p:sp>
+        <p:nvSpPr>
+          <p:cNvPr id="3" name="Notes Placeholder 2"/>
+          <p:cNvSpPr>
+            <a:spLocks noGrp="1"/>
+          </p:cNvSpPr>
+          <p:nvPr>
+            <p:ph type="body" idx="1"/>
+          </p:nvPr>
+        </p:nvSpPr>
+        <p:spPr/>
+        <p:txBody>
+          <a:bodyPr/>
+          <a:lstStyle/>
+          <a:p>
+            <a:endParaRPr lang="en-US"/>
+          </a:p>
+        </p:txBody>
+      </p:sp>
+      <p:sp>
+        <p:nvSpPr>
+          <p:cNvPr id="4" name="Slide Number Placeholder 3"/>
+          <p:cNvSpPr>
+            <a:spLocks noGrp="1"/>
+          </p:cNvSpPr>
+          <p:nvPr>
+            <p:ph type="sldNum" sz="quarter" idx="5"/>
+          </p:nvPr>
+        </p:nvSpPr>
+        <p:spPr/>
+        <p:txBody>
+          <a:bodyPr/>
+          <a:lstStyle/>
+          <a:p>
+            <a:fld id="{30752F2A-FA59-1746-ABA5-28C394E5ED08}" type="slidenum">
+              <a:rPr lang="en-US" smtClean="0"/>
+              <a:t>28</a:t>
+            </a:fld>
+            <a:endParaRPr lang="en-US"/>
+          </a:p>
+        </p:txBody>
+      </p:sp>
+    </p:spTree>
+    <p:extLst>
+      <p:ext uri="{BB962C8B-B14F-4D97-AF65-F5344CB8AC3E}">
+        <p14:creationId xmlns:p14="http://schemas.microsoft.com/office/powerpoint/2010/main" val="699734651"/>
+      </p:ext>
+    </p:extLst>
+  </p:cSld>
+  <p:clrMapOvr>
+    <a:masterClrMapping/>
+  </p:clrMapOvr>
+</p:notes>
+</file>
+
 <file path=ppt/notesSlides/notesSlide3.xml><?xml version="1.0" encoding="utf-8"?>
 <p:notes xmlns:a="http://schemas.openxmlformats.org/drawingml/2006/main" xmlns:r="http://schemas.openxmlformats.org/officeDocument/2006/relationships" xmlns:p="http://schemas.openxmlformats.org/presentationml/2006/main">
   <p:cSld>
@@ -781,18 +2399,7 @@
           <a:bodyPr/>
           <a:lstStyle/>
           <a:p>
-            <a:r>
-              <a:rPr lang="en-US"/>
-              <a:t>Do not modify the notes in this section to avoid tampering with the Poll Everywhere activity.
-More info at polleverywhere.com/support
-How many weights in a neural net with 4 inputs, 1 output and 3 hidden neurons across each of 2 hidden layers?</a:t>
-            </a:r>
-          </a:p>
-          <a:p>
-            <a:r>
-              <a:rPr lang="en-US"/>
-              <a:t>https://www.polleverywhere.com/multiple_choice_polls/jiILwRZI4f4Fp2NGhvLKg?state=opened&amp;flow=Default&amp;onscreen=persist</a:t>
-            </a:r>
+            <a:endParaRPr lang="en-US"/>
           </a:p>
         </p:txBody>
       </p:sp>
@@ -813,7 +2420,7 @@
           <a:p>
             <a:fld id="{30752F2A-FA59-1746-ABA5-28C394E5ED08}" type="slidenum">
               <a:rPr lang="en-US" smtClean="0"/>
-              <a:t>21</a:t>
+              <a:t>3</a:t>
             </a:fld>
             <a:endParaRPr lang="en-US"/>
           </a:p>
@@ -822,7 +2429,7 @@
     </p:spTree>
     <p:extLst>
       <p:ext uri="{BB962C8B-B14F-4D97-AF65-F5344CB8AC3E}">
-        <p14:creationId xmlns:p14="http://schemas.microsoft.com/office/powerpoint/2010/main" val="4039357474"/>
+        <p14:creationId xmlns:p14="http://schemas.microsoft.com/office/powerpoint/2010/main" val="2049983572"/>
       </p:ext>
     </p:extLst>
   </p:cSld>
@@ -876,18 +2483,7 @@
           <a:bodyPr/>
           <a:lstStyle/>
           <a:p>
-            <a:r>
-              <a:rPr lang="en-US"/>
-              <a:t>Do not modify the notes in this section to avoid tampering with the Poll Everywhere activity.
-More info at polleverywhere.com/support
-If we build a neural network with 10 hidden layers but do not use any activation functions (like ReLU or Sigmoid) between them, what is the mathematical result of the entire network?</a:t>
-            </a:r>
-          </a:p>
-          <a:p>
-            <a:r>
-              <a:rPr lang="en-US"/>
-              <a:t>https://www.polleverywhere.com/multiple_choice_polls/0DiaqtZCrsQQdBoL8wxjR?state=opened&amp;flow=Default&amp;onscreen=persist</a:t>
-            </a:r>
+            <a:endParaRPr lang="en-US"/>
           </a:p>
         </p:txBody>
       </p:sp>
@@ -908,7 +2504,7 @@
           <a:p>
             <a:fld id="{30752F2A-FA59-1746-ABA5-28C394E5ED08}" type="slidenum">
               <a:rPr lang="en-US" smtClean="0"/>
-              <a:t>22</a:t>
+              <a:t>4</a:t>
             </a:fld>
             <a:endParaRPr lang="en-US"/>
           </a:p>
@@ -917,7 +2513,427 @@
     </p:spTree>
     <p:extLst>
       <p:ext uri="{BB962C8B-B14F-4D97-AF65-F5344CB8AC3E}">
-        <p14:creationId xmlns:p14="http://schemas.microsoft.com/office/powerpoint/2010/main" val="3462176253"/>
+        <p14:creationId xmlns:p14="http://schemas.microsoft.com/office/powerpoint/2010/main" val="2022044079"/>
+      </p:ext>
+    </p:extLst>
+  </p:cSld>
+  <p:clrMapOvr>
+    <a:masterClrMapping/>
+  </p:clrMapOvr>
+</p:notes>
+</file>
+
+<file path=ppt/notesSlides/notesSlide5.xml><?xml version="1.0" encoding="utf-8"?>
+<p:notes xmlns:a="http://schemas.openxmlformats.org/drawingml/2006/main" xmlns:r="http://schemas.openxmlformats.org/officeDocument/2006/relationships" xmlns:p="http://schemas.openxmlformats.org/presentationml/2006/main">
+  <p:cSld>
+    <p:spTree>
+      <p:nvGrpSpPr>
+        <p:cNvPr id="1" name=""/>
+        <p:cNvGrpSpPr/>
+        <p:nvPr/>
+      </p:nvGrpSpPr>
+      <p:grpSpPr>
+        <a:xfrm>
+          <a:off x="0" y="0"/>
+          <a:ext cx="0" cy="0"/>
+          <a:chOff x="0" y="0"/>
+          <a:chExt cx="0" cy="0"/>
+        </a:xfrm>
+      </p:grpSpPr>
+      <p:sp>
+        <p:nvSpPr>
+          <p:cNvPr id="2" name="Slide Image Placeholder 1"/>
+          <p:cNvSpPr>
+            <a:spLocks noGrp="1" noRot="1" noChangeAspect="1"/>
+          </p:cNvSpPr>
+          <p:nvPr>
+            <p:ph type="sldImg"/>
+          </p:nvPr>
+        </p:nvSpPr>
+        <p:spPr/>
+      </p:sp>
+      <p:sp>
+        <p:nvSpPr>
+          <p:cNvPr id="3" name="Notes Placeholder 2"/>
+          <p:cNvSpPr>
+            <a:spLocks noGrp="1"/>
+          </p:cNvSpPr>
+          <p:nvPr>
+            <p:ph type="body" idx="1"/>
+          </p:nvPr>
+        </p:nvSpPr>
+        <p:spPr/>
+        <p:txBody>
+          <a:bodyPr/>
+          <a:lstStyle/>
+          <a:p>
+            <a:endParaRPr lang="en-US"/>
+          </a:p>
+        </p:txBody>
+      </p:sp>
+      <p:sp>
+        <p:nvSpPr>
+          <p:cNvPr id="4" name="Slide Number Placeholder 3"/>
+          <p:cNvSpPr>
+            <a:spLocks noGrp="1"/>
+          </p:cNvSpPr>
+          <p:nvPr>
+            <p:ph type="sldNum" sz="quarter" idx="5"/>
+          </p:nvPr>
+        </p:nvSpPr>
+        <p:spPr/>
+        <p:txBody>
+          <a:bodyPr/>
+          <a:lstStyle/>
+          <a:p>
+            <a:fld id="{30752F2A-FA59-1746-ABA5-28C394E5ED08}" type="slidenum">
+              <a:rPr lang="en-US" smtClean="0"/>
+              <a:t>5</a:t>
+            </a:fld>
+            <a:endParaRPr lang="en-US"/>
+          </a:p>
+        </p:txBody>
+      </p:sp>
+    </p:spTree>
+    <p:extLst>
+      <p:ext uri="{BB962C8B-B14F-4D97-AF65-F5344CB8AC3E}">
+        <p14:creationId xmlns:p14="http://schemas.microsoft.com/office/powerpoint/2010/main" val="968815431"/>
+      </p:ext>
+    </p:extLst>
+  </p:cSld>
+  <p:clrMapOvr>
+    <a:masterClrMapping/>
+  </p:clrMapOvr>
+</p:notes>
+</file>
+
+<file path=ppt/notesSlides/notesSlide6.xml><?xml version="1.0" encoding="utf-8"?>
+<p:notes xmlns:a="http://schemas.openxmlformats.org/drawingml/2006/main" xmlns:r="http://schemas.openxmlformats.org/officeDocument/2006/relationships" xmlns:p="http://schemas.openxmlformats.org/presentationml/2006/main">
+  <p:cSld>
+    <p:spTree>
+      <p:nvGrpSpPr>
+        <p:cNvPr id="1" name=""/>
+        <p:cNvGrpSpPr/>
+        <p:nvPr/>
+      </p:nvGrpSpPr>
+      <p:grpSpPr>
+        <a:xfrm>
+          <a:off x="0" y="0"/>
+          <a:ext cx="0" cy="0"/>
+          <a:chOff x="0" y="0"/>
+          <a:chExt cx="0" cy="0"/>
+        </a:xfrm>
+      </p:grpSpPr>
+      <p:sp>
+        <p:nvSpPr>
+          <p:cNvPr id="2" name="Slide Image Placeholder 1"/>
+          <p:cNvSpPr>
+            <a:spLocks noGrp="1" noRot="1" noChangeAspect="1"/>
+          </p:cNvSpPr>
+          <p:nvPr>
+            <p:ph type="sldImg"/>
+          </p:nvPr>
+        </p:nvSpPr>
+        <p:spPr/>
+      </p:sp>
+      <p:sp>
+        <p:nvSpPr>
+          <p:cNvPr id="3" name="Notes Placeholder 2"/>
+          <p:cNvSpPr>
+            <a:spLocks noGrp="1"/>
+          </p:cNvSpPr>
+          <p:nvPr>
+            <p:ph type="body" idx="1"/>
+          </p:nvPr>
+        </p:nvSpPr>
+        <p:spPr/>
+        <p:txBody>
+          <a:bodyPr/>
+          <a:lstStyle/>
+          <a:p>
+            <a:endParaRPr lang="en-US"/>
+          </a:p>
+        </p:txBody>
+      </p:sp>
+      <p:sp>
+        <p:nvSpPr>
+          <p:cNvPr id="4" name="Slide Number Placeholder 3"/>
+          <p:cNvSpPr>
+            <a:spLocks noGrp="1"/>
+          </p:cNvSpPr>
+          <p:nvPr>
+            <p:ph type="sldNum" sz="quarter" idx="5"/>
+          </p:nvPr>
+        </p:nvSpPr>
+        <p:spPr/>
+        <p:txBody>
+          <a:bodyPr/>
+          <a:lstStyle/>
+          <a:p>
+            <a:fld id="{30752F2A-FA59-1746-ABA5-28C394E5ED08}" type="slidenum">
+              <a:rPr lang="en-US" smtClean="0"/>
+              <a:t>6</a:t>
+            </a:fld>
+            <a:endParaRPr lang="en-US"/>
+          </a:p>
+        </p:txBody>
+      </p:sp>
+    </p:spTree>
+    <p:extLst>
+      <p:ext uri="{BB962C8B-B14F-4D97-AF65-F5344CB8AC3E}">
+        <p14:creationId xmlns:p14="http://schemas.microsoft.com/office/powerpoint/2010/main" val="150533275"/>
+      </p:ext>
+    </p:extLst>
+  </p:cSld>
+  <p:clrMapOvr>
+    <a:masterClrMapping/>
+  </p:clrMapOvr>
+</p:notes>
+</file>
+
+<file path=ppt/notesSlides/notesSlide7.xml><?xml version="1.0" encoding="utf-8"?>
+<p:notes xmlns:a="http://schemas.openxmlformats.org/drawingml/2006/main" xmlns:r="http://schemas.openxmlformats.org/officeDocument/2006/relationships" xmlns:p="http://schemas.openxmlformats.org/presentationml/2006/main">
+  <p:cSld>
+    <p:spTree>
+      <p:nvGrpSpPr>
+        <p:cNvPr id="1" name=""/>
+        <p:cNvGrpSpPr/>
+        <p:nvPr/>
+      </p:nvGrpSpPr>
+      <p:grpSpPr>
+        <a:xfrm>
+          <a:off x="0" y="0"/>
+          <a:ext cx="0" cy="0"/>
+          <a:chOff x="0" y="0"/>
+          <a:chExt cx="0" cy="0"/>
+        </a:xfrm>
+      </p:grpSpPr>
+      <p:sp>
+        <p:nvSpPr>
+          <p:cNvPr id="2" name="Slide Image Placeholder 1"/>
+          <p:cNvSpPr>
+            <a:spLocks noGrp="1" noRot="1" noChangeAspect="1"/>
+          </p:cNvSpPr>
+          <p:nvPr>
+            <p:ph type="sldImg"/>
+          </p:nvPr>
+        </p:nvSpPr>
+        <p:spPr/>
+      </p:sp>
+      <p:sp>
+        <p:nvSpPr>
+          <p:cNvPr id="3" name="Notes Placeholder 2"/>
+          <p:cNvSpPr>
+            <a:spLocks noGrp="1"/>
+          </p:cNvSpPr>
+          <p:nvPr>
+            <p:ph type="body" idx="1"/>
+          </p:nvPr>
+        </p:nvSpPr>
+        <p:spPr/>
+        <p:txBody>
+          <a:bodyPr/>
+          <a:lstStyle/>
+          <a:p>
+            <a:endParaRPr lang="en-US"/>
+          </a:p>
+        </p:txBody>
+      </p:sp>
+      <p:sp>
+        <p:nvSpPr>
+          <p:cNvPr id="4" name="Slide Number Placeholder 3"/>
+          <p:cNvSpPr>
+            <a:spLocks noGrp="1"/>
+          </p:cNvSpPr>
+          <p:nvPr>
+            <p:ph type="sldNum" sz="quarter" idx="5"/>
+          </p:nvPr>
+        </p:nvSpPr>
+        <p:spPr/>
+        <p:txBody>
+          <a:bodyPr/>
+          <a:lstStyle/>
+          <a:p>
+            <a:fld id="{30752F2A-FA59-1746-ABA5-28C394E5ED08}" type="slidenum">
+              <a:rPr lang="en-US" smtClean="0"/>
+              <a:t>7</a:t>
+            </a:fld>
+            <a:endParaRPr lang="en-US"/>
+          </a:p>
+        </p:txBody>
+      </p:sp>
+    </p:spTree>
+    <p:extLst>
+      <p:ext uri="{BB962C8B-B14F-4D97-AF65-F5344CB8AC3E}">
+        <p14:creationId xmlns:p14="http://schemas.microsoft.com/office/powerpoint/2010/main" val="663617142"/>
+      </p:ext>
+    </p:extLst>
+  </p:cSld>
+  <p:clrMapOvr>
+    <a:masterClrMapping/>
+  </p:clrMapOvr>
+</p:notes>
+</file>
+
+<file path=ppt/notesSlides/notesSlide8.xml><?xml version="1.0" encoding="utf-8"?>
+<p:notes xmlns:a="http://schemas.openxmlformats.org/drawingml/2006/main" xmlns:r="http://schemas.openxmlformats.org/officeDocument/2006/relationships" xmlns:p="http://schemas.openxmlformats.org/presentationml/2006/main">
+  <p:cSld>
+    <p:spTree>
+      <p:nvGrpSpPr>
+        <p:cNvPr id="1" name=""/>
+        <p:cNvGrpSpPr/>
+        <p:nvPr/>
+      </p:nvGrpSpPr>
+      <p:grpSpPr>
+        <a:xfrm>
+          <a:off x="0" y="0"/>
+          <a:ext cx="0" cy="0"/>
+          <a:chOff x="0" y="0"/>
+          <a:chExt cx="0" cy="0"/>
+        </a:xfrm>
+      </p:grpSpPr>
+      <p:sp>
+        <p:nvSpPr>
+          <p:cNvPr id="2" name="Slide Image Placeholder 1"/>
+          <p:cNvSpPr>
+            <a:spLocks noGrp="1" noRot="1" noChangeAspect="1"/>
+          </p:cNvSpPr>
+          <p:nvPr>
+            <p:ph type="sldImg"/>
+          </p:nvPr>
+        </p:nvSpPr>
+        <p:spPr/>
+      </p:sp>
+      <p:sp>
+        <p:nvSpPr>
+          <p:cNvPr id="3" name="Notes Placeholder 2"/>
+          <p:cNvSpPr>
+            <a:spLocks noGrp="1"/>
+          </p:cNvSpPr>
+          <p:nvPr>
+            <p:ph type="body" idx="1"/>
+          </p:nvPr>
+        </p:nvSpPr>
+        <p:spPr/>
+        <p:txBody>
+          <a:bodyPr/>
+          <a:lstStyle/>
+          <a:p>
+            <a:endParaRPr lang="en-US"/>
+          </a:p>
+        </p:txBody>
+      </p:sp>
+      <p:sp>
+        <p:nvSpPr>
+          <p:cNvPr id="4" name="Slide Number Placeholder 3"/>
+          <p:cNvSpPr>
+            <a:spLocks noGrp="1"/>
+          </p:cNvSpPr>
+          <p:nvPr>
+            <p:ph type="sldNum" sz="quarter" idx="5"/>
+          </p:nvPr>
+        </p:nvSpPr>
+        <p:spPr/>
+        <p:txBody>
+          <a:bodyPr/>
+          <a:lstStyle/>
+          <a:p>
+            <a:fld id="{30752F2A-FA59-1746-ABA5-28C394E5ED08}" type="slidenum">
+              <a:rPr lang="en-US" smtClean="0"/>
+              <a:t>8</a:t>
+            </a:fld>
+            <a:endParaRPr lang="en-US"/>
+          </a:p>
+        </p:txBody>
+      </p:sp>
+    </p:spTree>
+    <p:extLst>
+      <p:ext uri="{BB962C8B-B14F-4D97-AF65-F5344CB8AC3E}">
+        <p14:creationId xmlns:p14="http://schemas.microsoft.com/office/powerpoint/2010/main" val="3703978991"/>
+      </p:ext>
+    </p:extLst>
+  </p:cSld>
+  <p:clrMapOvr>
+    <a:masterClrMapping/>
+  </p:clrMapOvr>
+</p:notes>
+</file>
+
+<file path=ppt/notesSlides/notesSlide9.xml><?xml version="1.0" encoding="utf-8"?>
+<p:notes xmlns:a="http://schemas.openxmlformats.org/drawingml/2006/main" xmlns:r="http://schemas.openxmlformats.org/officeDocument/2006/relationships" xmlns:p="http://schemas.openxmlformats.org/presentationml/2006/main">
+  <p:cSld>
+    <p:spTree>
+      <p:nvGrpSpPr>
+        <p:cNvPr id="1" name=""/>
+        <p:cNvGrpSpPr/>
+        <p:nvPr/>
+      </p:nvGrpSpPr>
+      <p:grpSpPr>
+        <a:xfrm>
+          <a:off x="0" y="0"/>
+          <a:ext cx="0" cy="0"/>
+          <a:chOff x="0" y="0"/>
+          <a:chExt cx="0" cy="0"/>
+        </a:xfrm>
+      </p:grpSpPr>
+      <p:sp>
+        <p:nvSpPr>
+          <p:cNvPr id="2" name="Slide Image Placeholder 1"/>
+          <p:cNvSpPr>
+            <a:spLocks noGrp="1" noRot="1" noChangeAspect="1"/>
+          </p:cNvSpPr>
+          <p:nvPr>
+            <p:ph type="sldImg"/>
+          </p:nvPr>
+        </p:nvSpPr>
+        <p:spPr/>
+      </p:sp>
+      <p:sp>
+        <p:nvSpPr>
+          <p:cNvPr id="3" name="Notes Placeholder 2"/>
+          <p:cNvSpPr>
+            <a:spLocks noGrp="1"/>
+          </p:cNvSpPr>
+          <p:nvPr>
+            <p:ph type="body" idx="1"/>
+          </p:nvPr>
+        </p:nvSpPr>
+        <p:spPr/>
+        <p:txBody>
+          <a:bodyPr/>
+          <a:lstStyle/>
+          <a:p>
+            <a:endParaRPr lang="en-US"/>
+          </a:p>
+        </p:txBody>
+      </p:sp>
+      <p:sp>
+        <p:nvSpPr>
+          <p:cNvPr id="4" name="Slide Number Placeholder 3"/>
+          <p:cNvSpPr>
+            <a:spLocks noGrp="1"/>
+          </p:cNvSpPr>
+          <p:nvPr>
+            <p:ph type="sldNum" sz="quarter" idx="5"/>
+          </p:nvPr>
+        </p:nvSpPr>
+        <p:spPr/>
+        <p:txBody>
+          <a:bodyPr/>
+          <a:lstStyle/>
+          <a:p>
+            <a:fld id="{30752F2A-FA59-1746-ABA5-28C394E5ED08}" type="slidenum">
+              <a:rPr lang="en-US" smtClean="0"/>
+              <a:t>9</a:t>
+            </a:fld>
+            <a:endParaRPr lang="en-US"/>
+          </a:p>
+        </p:txBody>
+      </p:sp>
+    </p:spTree>
+    <p:extLst>
+      <p:ext uri="{BB962C8B-B14F-4D97-AF65-F5344CB8AC3E}">
+        <p14:creationId xmlns:p14="http://schemas.microsoft.com/office/powerpoint/2010/main" val="113642823"/>
       </p:ext>
     </p:extLst>
   </p:cSld>
@@ -1120,7 +3136,7 @@
             <a:fld id="{16F2FB5F-D553-C945-B874-A642CC0C851F}" type="datetime3">
               <a:rPr lang="en-IE" smtClean="0"/>
               <a:pPr/>
-              <a:t>15 February 2026</a:t>
+              <a:t>23 February 2026</a:t>
             </a:fld>
             <a:endParaRPr lang="en-US" dirty="0"/>
           </a:p>
@@ -1991,7 +4007,7 @@
             <a:fld id="{16F2FB5F-D553-C945-B874-A642CC0C851F}" type="datetime3">
               <a:rPr lang="en-IE" smtClean="0"/>
               <a:pPr/>
-              <a:t>15 February 2026</a:t>
+              <a:t>23 February 2026</a:t>
             </a:fld>
             <a:endParaRPr lang="en-US" dirty="0"/>
           </a:p>
@@ -2203,7 +4219,7 @@
             <a:fld id="{16F2FB5F-D553-C945-B874-A642CC0C851F}" type="datetime3">
               <a:rPr lang="en-IE" smtClean="0"/>
               <a:pPr/>
-              <a:t>15 February 2026</a:t>
+              <a:t>23 February 2026</a:t>
             </a:fld>
             <a:endParaRPr lang="en-US" dirty="0"/>
           </a:p>
@@ -2378,7 +4394,7 @@
           <a:p>
             <a:fld id="{BEF41344-4D35-F145-B477-F6239A2130EE}" type="datetime3">
               <a:rPr lang="en-IE" smtClean="0"/>
-              <a:t>15 February 2026</a:t>
+              <a:t>23 February 2026</a:t>
             </a:fld>
             <a:endParaRPr lang="en-US"/>
           </a:p>
@@ -2654,7 +4670,7 @@
           <a:p>
             <a:fld id="{07196900-CA2A-2D43-9641-C5C0DD2D22D3}" type="datetime3">
               <a:rPr lang="en-IE" smtClean="0"/>
-              <a:t>15 February 2026</a:t>
+              <a:t>23 February 2026</a:t>
             </a:fld>
             <a:endParaRPr lang="en-US"/>
           </a:p>
@@ -2922,7 +4938,7 @@
           <a:p>
             <a:fld id="{8AB1A910-F8E0-D541-83F2-2CFD6E718762}" type="datetime3">
               <a:rPr lang="en-IE" smtClean="0"/>
-              <a:t>15 February 2026</a:t>
+              <a:t>23 February 2026</a:t>
             </a:fld>
             <a:endParaRPr lang="en-US"/>
           </a:p>
@@ -3064,7 +5080,7 @@
           <a:p>
             <a:fld id="{7E245B59-D3F3-5B43-BDD1-6C7B7CFD2AA6}" type="datetime3">
               <a:rPr lang="en-IE" smtClean="0"/>
-              <a:t>15 February 2026</a:t>
+              <a:t>23 February 2026</a:t>
             </a:fld>
             <a:endParaRPr lang="en-US"/>
           </a:p>
@@ -3177,7 +5193,7 @@
           <a:p>
             <a:fld id="{AD77DDCF-3644-8C44-AE36-2C59F897E125}" type="datetime3">
               <a:rPr lang="en-IE" smtClean="0"/>
-              <a:t>15 February 2026</a:t>
+              <a:t>23 February 2026</a:t>
             </a:fld>
             <a:endParaRPr lang="en-US"/>
           </a:p>
@@ -3588,7 +5604,7 @@
           <a:p>
             <a:fld id="{C1B28D5F-B017-3B47-9775-DA319F6143FF}" type="datetime3">
               <a:rPr lang="en-IE" smtClean="0"/>
-              <a:t>15 February 2026</a:t>
+              <a:t>23 February 2026</a:t>
             </a:fld>
             <a:endParaRPr lang="en-US" dirty="0"/>
           </a:p>
@@ -4613,7 +6629,7 @@
             </p:nvSpPr>
             <p:spPr>
               <a:blipFill>
-                <a:blip r:embed="rId2"/>
+                <a:blip r:embed="rId3"/>
                 <a:stretch>
                   <a:fillRect l="-1064" t="-2134"/>
                 </a:stretch>
@@ -4876,7 +6892,7 @@
             </p:nvSpPr>
             <p:spPr>
               <a:blipFill>
-                <a:blip r:embed="rId2"/>
+                <a:blip r:embed="rId3"/>
                 <a:stretch>
                   <a:fillRect l="-1216" t="-2744" r="-1976"/>
                 </a:stretch>
@@ -6174,7 +8190,7 @@
                 <a:avLst/>
               </a:prstGeom>
               <a:blipFill>
-                <a:blip r:embed="rId2"/>
+                <a:blip r:embed="rId3"/>
                 <a:stretch>
                   <a:fillRect/>
                 </a:stretch>
@@ -6290,7 +8306,7 @@
                 <a:avLst/>
               </a:prstGeom>
               <a:blipFill>
-                <a:blip r:embed="rId3"/>
+                <a:blip r:embed="rId4"/>
                 <a:stretch>
                   <a:fillRect/>
                 </a:stretch>
@@ -6431,7 +8447,7 @@
                 <a:avLst/>
               </a:prstGeom>
               <a:blipFill>
-                <a:blip r:embed="rId4"/>
+                <a:blip r:embed="rId5"/>
                 <a:stretch>
                   <a:fillRect/>
                 </a:stretch>
@@ -6752,7 +8768,7 @@
                 <a:avLst/>
               </a:prstGeom>
               <a:blipFill>
-                <a:blip r:embed="rId5"/>
+                <a:blip r:embed="rId6"/>
                 <a:stretch>
                   <a:fillRect/>
                 </a:stretch>
@@ -7164,7 +9180,7 @@
                 <a:avLst/>
               </a:prstGeom>
               <a:blipFill>
-                <a:blip r:embed="rId2"/>
+                <a:blip r:embed="rId3"/>
                 <a:stretch>
                   <a:fillRect/>
                 </a:stretch>
@@ -7280,7 +9296,7 @@
                 <a:avLst/>
               </a:prstGeom>
               <a:blipFill>
-                <a:blip r:embed="rId3"/>
+                <a:blip r:embed="rId4"/>
                 <a:stretch>
                   <a:fillRect/>
                 </a:stretch>
@@ -7421,7 +9437,7 @@
                 <a:avLst/>
               </a:prstGeom>
               <a:blipFill>
-                <a:blip r:embed="rId4"/>
+                <a:blip r:embed="rId5"/>
                 <a:stretch>
                   <a:fillRect/>
                 </a:stretch>
@@ -7742,7 +9758,7 @@
                 <a:avLst/>
               </a:prstGeom>
               <a:blipFill>
-                <a:blip r:embed="rId5"/>
+                <a:blip r:embed="rId6"/>
                 <a:stretch>
                   <a:fillRect/>
                 </a:stretch>
@@ -8012,7 +10028,7 @@
                 <a:avLst/>
               </a:prstGeom>
               <a:blipFill>
-                <a:blip r:embed="rId6"/>
+                <a:blip r:embed="rId7"/>
                 <a:stretch>
                   <a:fillRect/>
                 </a:stretch>
@@ -8153,7 +10169,7 @@
                 <a:avLst/>
               </a:prstGeom>
               <a:blipFill>
-                <a:blip r:embed="rId7"/>
+                <a:blip r:embed="rId8"/>
                 <a:stretch>
                   <a:fillRect/>
                 </a:stretch>
@@ -8675,7 +10691,7 @@
             </p:nvSpPr>
             <p:spPr>
               <a:blipFill>
-                <a:blip r:embed="rId2"/>
+                <a:blip r:embed="rId3"/>
                 <a:stretch>
                   <a:fillRect l="-1315" t="-2496" r="-146"/>
                 </a:stretch>
@@ -8946,7 +10962,7 @@
                 </a:r>
                 <a:r>
                   <a:rPr lang="en-US" dirty="0">
-                    <a:hlinkClick r:id="rId2"/>
+                    <a:hlinkClick r:id="rId3"/>
                   </a:rPr>
                   <a:t>https://en.wikipedia.org/wiki/Activation_function</a:t>
                 </a:r>
@@ -8977,7 +10993,7 @@
             </p:nvSpPr>
             <p:spPr>
               <a:blipFill>
-                <a:blip r:embed="rId3"/>
+                <a:blip r:embed="rId4"/>
                 <a:stretch>
                   <a:fillRect l="-1064" t="-3354" r="-608" b="-610"/>
                 </a:stretch>
@@ -9328,7 +11344,7 @@
                 <a:ext cx="5523073" cy="3908585"/>
               </a:xfrm>
               <a:blipFill>
-                <a:blip r:embed="rId2"/>
+                <a:blip r:embed="rId3"/>
                 <a:stretch>
                   <a:fillRect l="-993" t="-1404" r="-993" b="-936"/>
                 </a:stretch>
@@ -9364,7 +11380,7 @@
           <p:nvPr/>
         </p:nvPicPr>
         <p:blipFill>
-          <a:blip r:embed="rId3">
+          <a:blip r:embed="rId4">
             <a:extLst>
               <a:ext uri="{28A0092B-C50C-407E-A947-70E740481C1C}">
                 <a14:useLocalDpi xmlns:a14="http://schemas.microsoft.com/office/drawing/2010/main" val="0"/>
@@ -9916,7 +11932,7 @@
                 <a:ext cx="5809676" cy="3908585"/>
               </a:xfrm>
               <a:blipFill>
-                <a:blip r:embed="rId2"/>
+                <a:blip r:embed="rId3"/>
                 <a:stretch>
                   <a:fillRect l="-1469" t="-2808" b="-780"/>
                 </a:stretch>
@@ -9952,7 +11968,7 @@
           <p:nvPr/>
         </p:nvPicPr>
         <p:blipFill rotWithShape="1">
-          <a:blip r:embed="rId3">
+          <a:blip r:embed="rId4">
             <a:extLst>
               <a:ext uri="{28A0092B-C50C-407E-A947-70E740481C1C}">
                 <a14:useLocalDpi xmlns:a14="http://schemas.microsoft.com/office/drawing/2010/main" val="0"/>
@@ -10481,7 +12497,7 @@
             <a:fld id="{16F2FB5F-D553-C945-B874-A642CC0C851F}" type="datetime3">
               <a:rPr lang="en-IE" smtClean="0"/>
               <a:pPr/>
-              <a:t>15 February 2026</a:t>
+              <a:t>23 February 2026</a:t>
             </a:fld>
             <a:endParaRPr lang="en-US" dirty="0"/>
           </a:p>
@@ -10621,7 +12637,7 @@
             <a:fld id="{16F2FB5F-D553-C945-B874-A642CC0C851F}" type="datetime3">
               <a:rPr lang="en-IE" smtClean="0"/>
               <a:pPr/>
-              <a:t>15 February 2026</a:t>
+              <a:t>23 February 2026</a:t>
             </a:fld>
             <a:endParaRPr lang="en-US" dirty="0"/>
           </a:p>
@@ -10761,7 +12777,7 @@
             <a:fld id="{16F2FB5F-D553-C945-B874-A642CC0C851F}" type="datetime3">
               <a:rPr lang="en-IE" smtClean="0"/>
               <a:pPr/>
-              <a:t>15 February 2026</a:t>
+              <a:t>23 February 2026</a:t>
             </a:fld>
             <a:endParaRPr lang="en-US" dirty="0"/>
           </a:p>
@@ -11563,29 +13579,9 @@
                 <a:solidFill>
                   <a:srgbClr val="00959F"/>
                 </a:solidFill>
-                <a:hlinkClick r:id="rId2"/>
+                <a:hlinkClick r:id="rId3"/>
               </a:rPr>
               <a:t>Graphcast</a:t>
-            </a:r>
-            <a:endParaRPr lang="en-US" dirty="0">
-              <a:solidFill>
-                <a:srgbClr val="00959F"/>
-              </a:solidFill>
-            </a:endParaRPr>
-          </a:p>
-          <a:p>
-            <a:pPr marL="1200150" lvl="1" indent="-514350">
-              <a:buFont typeface="+mj-lt"/>
-              <a:buAutoNum type="arabicPeriod"/>
-            </a:pPr>
-            <a:r>
-              <a:rPr lang="en-US" dirty="0">
-                <a:solidFill>
-                  <a:srgbClr val="00959F"/>
-                </a:solidFill>
-                <a:hlinkClick r:id="rId3"/>
-              </a:rPr>
-              <a:t>Aardvark</a:t>
             </a:r>
             <a:endParaRPr lang="en-US" dirty="0">
               <a:solidFill>
@@ -11604,6 +13600,26 @@
                   <a:srgbClr val="00959F"/>
                 </a:solidFill>
                 <a:hlinkClick r:id="rId4"/>
+              </a:rPr>
+              <a:t>Aardvark</a:t>
+            </a:r>
+            <a:endParaRPr lang="en-US" dirty="0">
+              <a:solidFill>
+                <a:srgbClr val="00959F"/>
+              </a:solidFill>
+            </a:endParaRPr>
+          </a:p>
+          <a:p>
+            <a:pPr marL="1200150" lvl="1" indent="-514350">
+              <a:buFont typeface="+mj-lt"/>
+              <a:buAutoNum type="arabicPeriod"/>
+            </a:pPr>
+            <a:r>
+              <a:rPr lang="en-US" dirty="0">
+                <a:solidFill>
+                  <a:srgbClr val="00959F"/>
+                </a:solidFill>
+                <a:hlinkClick r:id="rId5"/>
               </a:rPr>
               <a:t>AIFS</a:t>
             </a:r>
@@ -11916,7 +13932,7 @@
             </p:nvSpPr>
             <p:spPr>
               <a:blipFill>
-                <a:blip r:embed="rId2"/>
+                <a:blip r:embed="rId3"/>
                 <a:stretch>
                   <a:fillRect l="-1368" t="-2439" r="-152"/>
                 </a:stretch>
@@ -12264,7 +14280,7 @@
             </p:nvSpPr>
             <p:spPr>
               <a:blipFill>
-                <a:blip r:embed="rId2"/>
+                <a:blip r:embed="rId3"/>
                 <a:stretch>
                   <a:fillRect l="-1368" t="-2439" r="-1824"/>
                 </a:stretch>
@@ -12658,7 +14674,7 @@
             </p:nvSpPr>
             <p:spPr>
               <a:blipFill>
-                <a:blip r:embed="rId2"/>
+                <a:blip r:embed="rId3"/>
                 <a:stretch>
                   <a:fillRect l="-1086" t="-2326" r="-241"/>
                 </a:stretch>
@@ -13001,7 +15017,7 @@
             </p:nvSpPr>
             <p:spPr>
               <a:blipFill>
-                <a:blip r:embed="rId2"/>
+                <a:blip r:embed="rId3"/>
                 <a:stretch>
                   <a:fillRect l="-1368" t="-5183"/>
                 </a:stretch>
@@ -13104,7 +15120,7 @@
           <a:p>
             <a:r>
               <a:rPr lang="en-US" dirty="0"/>
-              <a:t>Dot product quiz</a:t>
+              <a:t>Dot products examples</a:t>
             </a:r>
           </a:p>
         </p:txBody>
@@ -13411,7 +15427,7 @@
             </p:nvSpPr>
             <p:spPr>
               <a:blipFill>
-                <a:blip r:embed="rId2"/>
+                <a:blip r:embed="rId3"/>
                 <a:stretch>
                   <a:fillRect l="-1315" t="-2496"/>
                 </a:stretch>
@@ -13686,7 +15702,7 @@
             </p:nvSpPr>
             <p:spPr>
               <a:blipFill>
-                <a:blip r:embed="rId2"/>
+                <a:blip r:embed="rId3"/>
                 <a:stretch>
                   <a:fillRect l="-1216" t="-2744" r="-1520"/>
                 </a:stretch>
@@ -14174,7 +16190,7 @@
             </p:nvSpPr>
             <p:spPr>
               <a:blipFill>
-                <a:blip r:embed="rId2"/>
+                <a:blip r:embed="rId3"/>
                 <a:stretch>
                   <a:fillRect l="-1169" t="-2203"/>
                 </a:stretch>
